--- a/data/presentation/tableaux_pres.pptx
+++ b/data/presentation/tableaux_pres.pptx
@@ -5,7 +5,7 @@
     <p:sldMasterId id="2147483648" r:id="rId1"/>
   </p:sldMasterIdLst>
   <p:sldIdLst>
-    <p:sldId id="256" r:id="rId2"/>
+    <p:sldId id="256" r:id="rId8"/>
   </p:sldIdLst>
   <p:sldSz cx="9144000" cy="6858000" type="screen4x3"/>
   <p:notesSz cx="6858000" cy="9144000"/>
@@ -107,22 +107,6 @@
       </a:defRPr>
     </a:lvl9pPr>
   </p:defaultTextStyle>
-  <p:extLst>
-    <p:ext uri="{EFAFB233-063F-42B5-8137-9DF3F51BA10A}">
-      <p15:sldGuideLst xmlns:p15="http://schemas.microsoft.com/office/powerpoint/2012/main">
-        <p15:guide id="1" orient="horz" pos="2160">
-          <p15:clr>
-            <a:srgbClr val="A4A3A4"/>
-          </p15:clr>
-        </p15:guide>
-        <p15:guide id="2" pos="2880">
-          <p15:clr>
-            <a:srgbClr val="A4A3A4"/>
-          </p15:clr>
-        </p15:guide>
-      </p15:sldGuideLst>
-    </p:ext>
-  </p:extLst>
 </p:presentation>
 </file>
 
@@ -164,7 +148,7 @@
           <a:lstStyle/>
           <a:p>
             <a:r>
-              <a:rPr lang="en-US"/>
+              <a:rPr lang="en-US" smtClean="0"/>
               <a:t>Click to edit Master title style</a:t>
             </a:r>
             <a:endParaRPr lang="en-GB"/>
@@ -283,7 +267,7 @@
           </a:lstStyle>
           <a:p>
             <a:r>
-              <a:rPr lang="en-US"/>
+              <a:rPr lang="en-US" smtClean="0"/>
               <a:t>Click to edit Master subtitle style</a:t>
             </a:r>
             <a:endParaRPr lang="en-GB"/>
@@ -307,7 +291,7 @@
           <a:p>
             <a:fld id="{E6744CE3-0875-4B69-89C0-6F72D8139561}" type="datetimeFigureOut">
               <a:rPr lang="en-GB" smtClean="0"/>
-              <a:t>21/04/2026</a:t>
+              <a:t>26/05/17</a:t>
             </a:fld>
             <a:endParaRPr lang="en-GB"/>
           </a:p>
@@ -349,7 +333,7 @@
           <a:p>
             <a:fld id="{8DADB20D-508E-4C6D-A9E4-257D5607B0F6}" type="slidenum">
               <a:rPr lang="en-GB" smtClean="0"/>
-              <a:t>‹N°›</a:t>
+              <a:t>‹#›</a:t>
             </a:fld>
             <a:endParaRPr lang="en-GB"/>
           </a:p>
@@ -401,7 +385,7 @@
           <a:lstStyle/>
           <a:p>
             <a:r>
-              <a:rPr lang="en-US"/>
+              <a:rPr lang="en-US" smtClean="0"/>
               <a:t>Click to edit Master title style</a:t>
             </a:r>
             <a:endParaRPr lang="en-GB"/>
@@ -425,35 +409,35 @@
           <a:p>
             <a:pPr lvl="0"/>
             <a:r>
-              <a:rPr lang="en-US"/>
+              <a:rPr lang="en-US" smtClean="0"/>
               <a:t>Click to edit Master text styles</a:t>
             </a:r>
           </a:p>
           <a:p>
             <a:pPr lvl="1"/>
             <a:r>
-              <a:rPr lang="en-US"/>
+              <a:rPr lang="en-US" smtClean="0"/>
               <a:t>Second level</a:t>
             </a:r>
           </a:p>
           <a:p>
             <a:pPr lvl="2"/>
             <a:r>
-              <a:rPr lang="en-US"/>
+              <a:rPr lang="en-US" smtClean="0"/>
               <a:t>Third level</a:t>
             </a:r>
           </a:p>
           <a:p>
             <a:pPr lvl="3"/>
             <a:r>
-              <a:rPr lang="en-US"/>
+              <a:rPr lang="en-US" smtClean="0"/>
               <a:t>Fourth level</a:t>
             </a:r>
           </a:p>
           <a:p>
             <a:pPr lvl="4"/>
             <a:r>
-              <a:rPr lang="en-US"/>
+              <a:rPr lang="en-US" smtClean="0"/>
               <a:t>Fifth level</a:t>
             </a:r>
             <a:endParaRPr lang="en-GB"/>
@@ -477,7 +461,7 @@
           <a:p>
             <a:fld id="{E6744CE3-0875-4B69-89C0-6F72D8139561}" type="datetimeFigureOut">
               <a:rPr lang="en-GB" smtClean="0"/>
-              <a:t>21/04/2026</a:t>
+              <a:t>26/05/17</a:t>
             </a:fld>
             <a:endParaRPr lang="en-GB"/>
           </a:p>
@@ -519,7 +503,7 @@
           <a:p>
             <a:fld id="{8DADB20D-508E-4C6D-A9E4-257D5607B0F6}" type="slidenum">
               <a:rPr lang="en-GB" smtClean="0"/>
-              <a:t>‹N°›</a:t>
+              <a:t>‹#›</a:t>
             </a:fld>
             <a:endParaRPr lang="en-GB"/>
           </a:p>
@@ -580,7 +564,7 @@
           </a:lstStyle>
           <a:p>
             <a:r>
-              <a:rPr lang="en-US"/>
+              <a:rPr lang="en-US" smtClean="0"/>
               <a:t>Click to edit Master title style</a:t>
             </a:r>
             <a:endParaRPr lang="en-GB"/>
@@ -700,7 +684,7 @@
           <a:p>
             <a:pPr lvl="0"/>
             <a:r>
-              <a:rPr lang="en-US"/>
+              <a:rPr lang="en-US" smtClean="0"/>
               <a:t>Click to edit Master text styles</a:t>
             </a:r>
           </a:p>
@@ -723,7 +707,7 @@
           <a:p>
             <a:fld id="{E6744CE3-0875-4B69-89C0-6F72D8139561}" type="datetimeFigureOut">
               <a:rPr lang="en-GB" smtClean="0"/>
-              <a:t>21/04/2026</a:t>
+              <a:t>26/05/17</a:t>
             </a:fld>
             <a:endParaRPr lang="en-GB"/>
           </a:p>
@@ -765,7 +749,7 @@
           <a:p>
             <a:fld id="{8DADB20D-508E-4C6D-A9E4-257D5607B0F6}" type="slidenum">
               <a:rPr lang="en-GB" smtClean="0"/>
-              <a:t>‹N°›</a:t>
+              <a:t>‹#›</a:t>
             </a:fld>
             <a:endParaRPr lang="en-GB"/>
           </a:p>
@@ -817,7 +801,7 @@
           <a:lstStyle/>
           <a:p>
             <a:r>
-              <a:rPr lang="en-US"/>
+              <a:rPr lang="en-US" smtClean="0"/>
               <a:t>Click to edit Master title style</a:t>
             </a:r>
             <a:endParaRPr lang="en-GB"/>
@@ -874,35 +858,35 @@
           <a:p>
             <a:pPr lvl="0"/>
             <a:r>
-              <a:rPr lang="en-US"/>
+              <a:rPr lang="en-US" smtClean="0"/>
               <a:t>Click to edit Master text styles</a:t>
             </a:r>
           </a:p>
           <a:p>
             <a:pPr lvl="1"/>
             <a:r>
-              <a:rPr lang="en-US"/>
+              <a:rPr lang="en-US" smtClean="0"/>
               <a:t>Second level</a:t>
             </a:r>
           </a:p>
           <a:p>
             <a:pPr lvl="2"/>
             <a:r>
-              <a:rPr lang="en-US"/>
+              <a:rPr lang="en-US" smtClean="0"/>
               <a:t>Third level</a:t>
             </a:r>
           </a:p>
           <a:p>
             <a:pPr lvl="3"/>
             <a:r>
-              <a:rPr lang="en-US"/>
+              <a:rPr lang="en-US" smtClean="0"/>
               <a:t>Fourth level</a:t>
             </a:r>
           </a:p>
           <a:p>
             <a:pPr lvl="4"/>
             <a:r>
-              <a:rPr lang="en-US"/>
+              <a:rPr lang="en-US" smtClean="0"/>
               <a:t>Fifth level</a:t>
             </a:r>
             <a:endParaRPr lang="en-GB"/>
@@ -959,35 +943,35 @@
           <a:p>
             <a:pPr lvl="0"/>
             <a:r>
-              <a:rPr lang="en-US"/>
+              <a:rPr lang="en-US" smtClean="0"/>
               <a:t>Click to edit Master text styles</a:t>
             </a:r>
           </a:p>
           <a:p>
             <a:pPr lvl="1"/>
             <a:r>
-              <a:rPr lang="en-US"/>
+              <a:rPr lang="en-US" smtClean="0"/>
               <a:t>Second level</a:t>
             </a:r>
           </a:p>
           <a:p>
             <a:pPr lvl="2"/>
             <a:r>
-              <a:rPr lang="en-US"/>
+              <a:rPr lang="en-US" smtClean="0"/>
               <a:t>Third level</a:t>
             </a:r>
           </a:p>
           <a:p>
             <a:pPr lvl="3"/>
             <a:r>
-              <a:rPr lang="en-US"/>
+              <a:rPr lang="en-US" smtClean="0"/>
               <a:t>Fourth level</a:t>
             </a:r>
           </a:p>
           <a:p>
             <a:pPr lvl="4"/>
             <a:r>
-              <a:rPr lang="en-US"/>
+              <a:rPr lang="en-US" smtClean="0"/>
               <a:t>Fifth level</a:t>
             </a:r>
             <a:endParaRPr lang="en-GB"/>
@@ -1011,7 +995,7 @@
           <a:p>
             <a:fld id="{E6744CE3-0875-4B69-89C0-6F72D8139561}" type="datetimeFigureOut">
               <a:rPr lang="en-GB" smtClean="0"/>
-              <a:t>21/04/2026</a:t>
+              <a:t>26/05/17</a:t>
             </a:fld>
             <a:endParaRPr lang="en-GB"/>
           </a:p>
@@ -1053,7 +1037,7 @@
           <a:p>
             <a:fld id="{8DADB20D-508E-4C6D-A9E4-257D5607B0F6}" type="slidenum">
               <a:rPr lang="en-GB" smtClean="0"/>
-              <a:t>‹N°›</a:t>
+              <a:t>‹#›</a:t>
             </a:fld>
             <a:endParaRPr lang="en-GB"/>
           </a:p>
@@ -1109,7 +1093,7 @@
           </a:lstStyle>
           <a:p>
             <a:r>
-              <a:rPr lang="en-US"/>
+              <a:rPr lang="en-US" smtClean="0"/>
               <a:t>Click to edit Master title style</a:t>
             </a:r>
             <a:endParaRPr lang="en-GB"/>
@@ -1175,7 +1159,7 @@
           <a:p>
             <a:pPr lvl="0"/>
             <a:r>
-              <a:rPr lang="en-US"/>
+              <a:rPr lang="en-US" smtClean="0"/>
               <a:t>Click to edit Master text styles</a:t>
             </a:r>
           </a:p>
@@ -1231,35 +1215,35 @@
           <a:p>
             <a:pPr lvl="0"/>
             <a:r>
-              <a:rPr lang="en-US"/>
+              <a:rPr lang="en-US" smtClean="0"/>
               <a:t>Click to edit Master text styles</a:t>
             </a:r>
           </a:p>
           <a:p>
             <a:pPr lvl="1"/>
             <a:r>
-              <a:rPr lang="en-US"/>
+              <a:rPr lang="en-US" smtClean="0"/>
               <a:t>Second level</a:t>
             </a:r>
           </a:p>
           <a:p>
             <a:pPr lvl="2"/>
             <a:r>
-              <a:rPr lang="en-US"/>
+              <a:rPr lang="en-US" smtClean="0"/>
               <a:t>Third level</a:t>
             </a:r>
           </a:p>
           <a:p>
             <a:pPr lvl="3"/>
             <a:r>
-              <a:rPr lang="en-US"/>
+              <a:rPr lang="en-US" smtClean="0"/>
               <a:t>Fourth level</a:t>
             </a:r>
           </a:p>
           <a:p>
             <a:pPr lvl="4"/>
             <a:r>
-              <a:rPr lang="en-US"/>
+              <a:rPr lang="en-US" smtClean="0"/>
               <a:t>Fifth level</a:t>
             </a:r>
             <a:endParaRPr lang="en-GB"/>
@@ -1325,7 +1309,7 @@
           <a:p>
             <a:pPr lvl="0"/>
             <a:r>
-              <a:rPr lang="en-US"/>
+              <a:rPr lang="en-US" smtClean="0"/>
               <a:t>Click to edit Master text styles</a:t>
             </a:r>
           </a:p>
@@ -1381,35 +1365,35 @@
           <a:p>
             <a:pPr lvl="0"/>
             <a:r>
-              <a:rPr lang="en-US"/>
+              <a:rPr lang="en-US" smtClean="0"/>
               <a:t>Click to edit Master text styles</a:t>
             </a:r>
           </a:p>
           <a:p>
             <a:pPr lvl="1"/>
             <a:r>
-              <a:rPr lang="en-US"/>
+              <a:rPr lang="en-US" smtClean="0"/>
               <a:t>Second level</a:t>
             </a:r>
           </a:p>
           <a:p>
             <a:pPr lvl="2"/>
             <a:r>
-              <a:rPr lang="en-US"/>
+              <a:rPr lang="en-US" smtClean="0"/>
               <a:t>Third level</a:t>
             </a:r>
           </a:p>
           <a:p>
             <a:pPr lvl="3"/>
             <a:r>
-              <a:rPr lang="en-US"/>
+              <a:rPr lang="en-US" smtClean="0"/>
               <a:t>Fourth level</a:t>
             </a:r>
           </a:p>
           <a:p>
             <a:pPr lvl="4"/>
             <a:r>
-              <a:rPr lang="en-US"/>
+              <a:rPr lang="en-US" smtClean="0"/>
               <a:t>Fifth level</a:t>
             </a:r>
             <a:endParaRPr lang="en-GB"/>
@@ -1433,7 +1417,7 @@
           <a:p>
             <a:fld id="{E6744CE3-0875-4B69-89C0-6F72D8139561}" type="datetimeFigureOut">
               <a:rPr lang="en-GB" smtClean="0"/>
-              <a:t>21/04/2026</a:t>
+              <a:t>26/05/17</a:t>
             </a:fld>
             <a:endParaRPr lang="en-GB"/>
           </a:p>
@@ -1475,7 +1459,7 @@
           <a:p>
             <a:fld id="{8DADB20D-508E-4C6D-A9E4-257D5607B0F6}" type="slidenum">
               <a:rPr lang="en-GB" smtClean="0"/>
-              <a:t>‹N°›</a:t>
+              <a:t>‹#›</a:t>
             </a:fld>
             <a:endParaRPr lang="en-GB"/>
           </a:p>
@@ -1527,7 +1511,7 @@
           <a:lstStyle/>
           <a:p>
             <a:r>
-              <a:rPr lang="en-US"/>
+              <a:rPr lang="en-US" smtClean="0"/>
               <a:t>Click to edit Master title style</a:t>
             </a:r>
             <a:endParaRPr lang="en-GB"/>
@@ -1551,7 +1535,7 @@
           <a:p>
             <a:fld id="{E6744CE3-0875-4B69-89C0-6F72D8139561}" type="datetimeFigureOut">
               <a:rPr lang="en-GB" smtClean="0"/>
-              <a:t>21/04/2026</a:t>
+              <a:t>26/05/17</a:t>
             </a:fld>
             <a:endParaRPr lang="en-GB"/>
           </a:p>
@@ -1593,7 +1577,7 @@
           <a:p>
             <a:fld id="{8DADB20D-508E-4C6D-A9E4-257D5607B0F6}" type="slidenum">
               <a:rPr lang="en-GB" smtClean="0"/>
-              <a:t>‹N°›</a:t>
+              <a:t>‹#›</a:t>
             </a:fld>
             <a:endParaRPr lang="en-GB"/>
           </a:p>
@@ -1646,7 +1630,7 @@
           <a:p>
             <a:fld id="{E6744CE3-0875-4B69-89C0-6F72D8139561}" type="datetimeFigureOut">
               <a:rPr lang="en-GB" smtClean="0"/>
-              <a:t>21/04/2026</a:t>
+              <a:t>26/05/17</a:t>
             </a:fld>
             <a:endParaRPr lang="en-GB"/>
           </a:p>
@@ -1688,7 +1672,7 @@
           <a:p>
             <a:fld id="{8DADB20D-508E-4C6D-A9E4-257D5607B0F6}" type="slidenum">
               <a:rPr lang="en-GB" smtClean="0"/>
-              <a:t>‹N°›</a:t>
+              <a:t>‹#›</a:t>
             </a:fld>
             <a:endParaRPr lang="en-GB"/>
           </a:p>
@@ -1755,7 +1739,7 @@
           <a:lstStyle/>
           <a:p>
             <a:r>
-              <a:rPr lang="en-US"/>
+              <a:rPr lang="en-US" smtClean="0"/>
               <a:t>Click to edit Master title style</a:t>
             </a:r>
             <a:endParaRPr lang="en-GB"/>
@@ -1789,35 +1773,35 @@
           <a:p>
             <a:pPr lvl="0"/>
             <a:r>
-              <a:rPr lang="en-US"/>
+              <a:rPr lang="en-US" smtClean="0"/>
               <a:t>Click to edit Master text styles</a:t>
             </a:r>
           </a:p>
           <a:p>
             <a:pPr lvl="1"/>
             <a:r>
-              <a:rPr lang="en-US"/>
+              <a:rPr lang="en-US" smtClean="0"/>
               <a:t>Second level</a:t>
             </a:r>
           </a:p>
           <a:p>
             <a:pPr lvl="2"/>
             <a:r>
-              <a:rPr lang="en-US"/>
+              <a:rPr lang="en-US" smtClean="0"/>
               <a:t>Third level</a:t>
             </a:r>
           </a:p>
           <a:p>
             <a:pPr lvl="3"/>
             <a:r>
-              <a:rPr lang="en-US"/>
+              <a:rPr lang="en-US" smtClean="0"/>
               <a:t>Fourth level</a:t>
             </a:r>
           </a:p>
           <a:p>
             <a:pPr lvl="4"/>
             <a:r>
-              <a:rPr lang="en-US"/>
+              <a:rPr lang="en-US" smtClean="0"/>
               <a:t>Fifth level</a:t>
             </a:r>
             <a:endParaRPr lang="en-GB"/>
@@ -1859,7 +1843,7 @@
           <a:p>
             <a:fld id="{E6744CE3-0875-4B69-89C0-6F72D8139561}" type="datetimeFigureOut">
               <a:rPr lang="en-GB" smtClean="0"/>
-              <a:t>21/04/2026</a:t>
+              <a:t>26/05/17</a:t>
             </a:fld>
             <a:endParaRPr lang="en-GB"/>
           </a:p>
@@ -1937,7 +1921,7 @@
           <a:p>
             <a:fld id="{8DADB20D-508E-4C6D-A9E4-257D5607B0F6}" type="slidenum">
               <a:rPr lang="en-GB" smtClean="0"/>
-              <a:t>‹N°›</a:t>
+              <a:t>‹#›</a:t>
             </a:fld>
             <a:endParaRPr lang="en-GB"/>
           </a:p>
@@ -2232,7 +2216,7 @@
       </p:grpSpPr>
       <p:sp>
         <p:nvSpPr>
-          <p:cNvPr id="2" name="Espace réservé du contenu 1"/>
+          <p:cNvPr id="2" name=""/>
           <p:cNvSpPr>
             <a:spLocks noGrp="1"/>
           </p:cNvSpPr>
@@ -2250,58 +2234,32 @@
           <a:bodyPr/>
           <a:lstStyle/>
           <a:p>
-            <a:pPr marL="0" indent="0" algn="ctr">
-              <a:buNone/>
-            </a:pPr>
             <a:r>
-              <a:rPr b="1" dirty="0"/>
-              <a:t>Categories et </a:t>
+              <a:rPr/>
+              <a:t>Categories et nombres</a:t>
             </a:r>
-            <a:r>
-              <a:rPr b="1" dirty="0" err="1"/>
-              <a:t>nombres</a:t>
-            </a:r>
-            <a:endParaRPr b="1" dirty="0"/>
           </a:p>
         </p:txBody>
       </p:sp>
       <p:graphicFrame>
         <p:nvGraphicFramePr>
-          <p:cNvPr id="3" name="Tableau 2"/>
+          <p:cNvPr id="3" name=""/>
           <p:cNvGraphicFramePr>
-            <a:graphicFrameLocks noGrp="1"/>
+            <a:graphicFrameLocks noGrp="true"/>
           </p:cNvGraphicFramePr>
-          <p:nvPr>
-            <p:extLst>
-              <p:ext uri="{D42A27DB-BD31-4B8C-83A1-F6EECF244321}">
-                <p14:modId xmlns:p14="http://schemas.microsoft.com/office/powerpoint/2010/main" val="1718973701"/>
-              </p:ext>
-            </p:extLst>
-          </p:nvPr>
+          <p:nvPr/>
         </p:nvGraphicFramePr>
-        <p:xfrm>
-          <a:off x="1273324" y="1139818"/>
-          <a:ext cx="2260388" cy="1203305"/>
+        <p:xfrm rot="0">
+          <a:off x="457200" y="1097280"/>
+          <a:ext cx="3840480" cy="2560320"/>
         </p:xfrm>
         <a:graphic>
           <a:graphicData uri="http://schemas.openxmlformats.org/drawingml/2006/table">
             <a:tbl>
               <a:tblPr/>
               <a:tblGrid>
-                <a:gridCol w="1762614">
-                  <a:extLst>
-                    <a:ext uri="{9D8B030D-6E8A-4147-A177-3AD203B41FA5}">
-                      <a16:colId xmlns:a16="http://schemas.microsoft.com/office/drawing/2014/main" val="20000"/>
-                    </a:ext>
-                  </a:extLst>
-                </a:gridCol>
-                <a:gridCol w="497774">
-                  <a:extLst>
-                    <a:ext uri="{9D8B030D-6E8A-4147-A177-3AD203B41FA5}">
-                      <a16:colId xmlns:a16="http://schemas.microsoft.com/office/drawing/2014/main" val="20001"/>
-                    </a:ext>
-                  </a:extLst>
-                </a:gridCol>
+                <a:gridCol w="1762614"/>
+                <a:gridCol w="497774"/>
               </a:tblGrid>
               <a:tr h="415125">
                 <a:tc>
@@ -2309,7 +2267,7 @@
                     <a:bodyPr/>
                     <a:lstStyle/>
                     <a:p>
-                      <a:pPr marL="50800" marR="50800" algn="l">
+                      <a:pPr algn="l" marL="50800" marR="50800">
                         <a:lnSpc>
                           <a:spcPct val="100000"/>
                         </a:lnSpc>
@@ -2322,7 +2280,7 @@
                         <a:buNone/>
                       </a:pPr>
                       <a:r>
-                        <a:rPr sz="1600" b="1" i="0" u="none" strike="noStrike" cap="none">
+                        <a:rPr cap="none" sz="1600" i="0" b="1" u="none" strike="noStrike">
                           <a:solidFill>
                             <a:srgbClr val="000000">
                               <a:alpha val="100000"/>
@@ -2330,22 +2288,23 @@
                           </a:solidFill>
                           <a:latin typeface="Arial"/>
                           <a:cs typeface="Arial"/>
+                          <a:ea typeface="Arial"/>
                           <a:sym typeface="Arial"/>
                         </a:rPr>
                         <a:t>Type de manioc</a:t>
                       </a:r>
                     </a:p>
                   </a:txBody>
-                  <a:tcPr marL="0" marR="0" marT="50800" marB="50800" anchor="ctr">
-                    <a:lnL w="0" cap="flat" cmpd="sng" algn="ctr">
+                  <a:tcPr anchor="ctr" marB="50800" marT="50800" marR="0" marL="0">
+                    <a:lnL algn="ctr" cmpd="sng" cap="flat" w="0">
                       <a:noFill/>
                       <a:prstDash val="solid"/>
                     </a:lnL>
-                    <a:lnR w="0" cap="flat" cmpd="sng" algn="ctr">
+                    <a:lnR algn="ctr" cmpd="sng" cap="flat" w="0">
                       <a:noFill/>
                       <a:prstDash val="solid"/>
                     </a:lnR>
-                    <a:lnT w="19050" cap="flat" cmpd="sng" algn="ctr">
+                    <a:lnT algn="ctr" cmpd="sng" cap="flat" w="19050">
                       <a:solidFill>
                         <a:srgbClr val="666666">
                           <a:alpha val="100000"/>
@@ -2353,7 +2312,7 @@
                       </a:solidFill>
                       <a:prstDash val="solid"/>
                     </a:lnT>
-                    <a:lnB w="19050" cap="flat" cmpd="sng" algn="ctr">
+                    <a:lnB algn="ctr" cmpd="sng" cap="flat" w="19050">
                       <a:solidFill>
                         <a:srgbClr val="666666">
                           <a:alpha val="100000"/>
@@ -2373,7 +2332,7 @@
                     <a:bodyPr/>
                     <a:lstStyle/>
                     <a:p>
-                      <a:pPr marL="50800" marR="50800" algn="ctr">
+                      <a:pPr algn="ctr" marL="50800" marR="50800">
                         <a:lnSpc>
                           <a:spcPct val="100000"/>
                         </a:lnSpc>
@@ -2386,7 +2345,7 @@
                         <a:buNone/>
                       </a:pPr>
                       <a:r>
-                        <a:rPr sz="1600" b="1" i="0" u="none" strike="noStrike" cap="none">
+                        <a:rPr cap="none" sz="1600" i="0" b="1" u="none" strike="noStrike">
                           <a:solidFill>
                             <a:srgbClr val="000000">
                               <a:alpha val="100000"/>
@@ -2394,22 +2353,23 @@
                           </a:solidFill>
                           <a:latin typeface="Arial"/>
                           <a:cs typeface="Arial"/>
+                          <a:ea typeface="Arial"/>
                           <a:sym typeface="Arial"/>
                         </a:rPr>
                         <a:t>Nb</a:t>
                       </a:r>
                     </a:p>
                   </a:txBody>
-                  <a:tcPr marL="0" marR="0" marT="50800" marB="50800" anchor="ctr">
-                    <a:lnL w="0" cap="flat" cmpd="sng" algn="ctr">
+                  <a:tcPr anchor="ctr" marB="50800" marT="50800" marR="0" marL="0">
+                    <a:lnL algn="ctr" cmpd="sng" cap="flat" w="0">
                       <a:noFill/>
                       <a:prstDash val="solid"/>
                     </a:lnL>
-                    <a:lnR w="0" cap="flat" cmpd="sng" algn="ctr">
+                    <a:lnR algn="ctr" cmpd="sng" cap="flat" w="0">
                       <a:noFill/>
                       <a:prstDash val="solid"/>
                     </a:lnR>
-                    <a:lnT w="19050" cap="flat" cmpd="sng" algn="ctr">
+                    <a:lnT algn="ctr" cmpd="sng" cap="flat" w="19050">
                       <a:solidFill>
                         <a:srgbClr val="666666">
                           <a:alpha val="100000"/>
@@ -2417,7 +2377,7 @@
                       </a:solidFill>
                       <a:prstDash val="solid"/>
                     </a:lnT>
-                    <a:lnB w="19050" cap="flat" cmpd="sng" algn="ctr">
+                    <a:lnB algn="ctr" cmpd="sng" cap="flat" w="19050">
                       <a:solidFill>
                         <a:srgbClr val="666666">
                           <a:alpha val="100000"/>
@@ -2432,19 +2392,14 @@
                     </a:solidFill>
                   </a:tcPr>
                 </a:tc>
-                <a:extLst>
-                  <a:ext uri="{0D108BD9-81ED-4DB2-BD59-A6C34878D82A}">
-                    <a16:rowId xmlns:a16="http://schemas.microsoft.com/office/drawing/2014/main" val="10000"/>
-                  </a:ext>
-                </a:extLst>
               </a:tr>
-              <a:tr h="375437">
+              <a:tr h="375536">
                 <a:tc>
                   <a:txBody>
                     <a:bodyPr/>
                     <a:lstStyle/>
                     <a:p>
-                      <a:pPr marL="50800" marR="50800" algn="l">
+                      <a:pPr algn="l" marL="50800" marR="50800">
                         <a:lnSpc>
                           <a:spcPct val="100000"/>
                         </a:lnSpc>
@@ -2457,7 +2412,7 @@
                         <a:buNone/>
                       </a:pPr>
                       <a:r>
-                        <a:rPr sz="1600" b="0" i="0" u="none" strike="noStrike" cap="none">
+                        <a:rPr cap="none" sz="1600" i="0" b="0" u="none" strike="noStrike">
                           <a:solidFill>
                             <a:srgbClr val="000000">
                               <a:alpha val="100000"/>
@@ -2465,31 +2420,27 @@
                           </a:solidFill>
                           <a:latin typeface="Arial"/>
                           <a:cs typeface="Arial"/>
+                          <a:ea typeface="Arial"/>
                           <a:sym typeface="Arial"/>
                         </a:rPr>
                         <a:t>manioc</a:t>
                       </a:r>
                     </a:p>
                   </a:txBody>
-                  <a:tcPr marL="0" marR="0" marT="50800" marB="50800" anchor="ctr">
-                    <a:lnL w="0" cap="flat" cmpd="sng" algn="ctr">
+                  <a:tcPr anchor="ctr" marB="50800" marT="50800" marR="0" marL="0">
+                    <a:lnL algn="ctr" cmpd="sng" cap="flat" w="0">
                       <a:noFill/>
                       <a:prstDash val="solid"/>
                     </a:lnL>
-                    <a:lnR w="0" cap="flat" cmpd="sng" algn="ctr">
+                    <a:lnR algn="ctr" cmpd="sng" cap="flat" w="0">
                       <a:noFill/>
                       <a:prstDash val="solid"/>
                     </a:lnR>
-                    <a:lnT w="19050" cap="flat" cmpd="sng" algn="ctr">
-                      <a:solidFill>
-                        <a:srgbClr val="666666"/>
-                      </a:solidFill>
-                      <a:prstDash val="solid"/>
-                      <a:round/>
-                      <a:headEnd type="none" w="med" len="med"/>
-                      <a:tailEnd type="none" w="med" len="med"/>
+                    <a:lnT algn="ctr" cmpd="sng" cap="flat" w="0">
+                      <a:noFill/>
+                      <a:prstDash val="solid"/>
                     </a:lnT>
-                    <a:lnB w="0" cap="flat" cmpd="sng" algn="ctr">
+                    <a:lnB algn="ctr" cmpd="sng" cap="flat" w="0">
                       <a:noFill/>
                       <a:prstDash val="solid"/>
                     </a:lnB>
@@ -2505,7 +2456,7 @@
                     <a:bodyPr/>
                     <a:lstStyle/>
                     <a:p>
-                      <a:pPr marL="50800" marR="50800" algn="ctr">
+                      <a:pPr algn="ctr" marL="50800" marR="50800">
                         <a:lnSpc>
                           <a:spcPct val="100000"/>
                         </a:lnSpc>
@@ -2518,7 +2469,7 @@
                         <a:buNone/>
                       </a:pPr>
                       <a:r>
-                        <a:rPr sz="1600" b="0" i="0" u="none" strike="noStrike" cap="none">
+                        <a:rPr cap="none" sz="1600" i="0" b="0" u="none" strike="noStrike">
                           <a:solidFill>
                             <a:srgbClr val="000000">
                               <a:alpha val="100000"/>
@@ -2526,31 +2477,27 @@
                           </a:solidFill>
                           <a:latin typeface="Arial"/>
                           <a:cs typeface="Arial"/>
+                          <a:ea typeface="Arial"/>
                           <a:sym typeface="Arial"/>
                         </a:rPr>
-                        <a:t>59</a:t>
+                        <a:t>63</a:t>
                       </a:r>
                     </a:p>
                   </a:txBody>
-                  <a:tcPr marL="0" marR="0" marT="50800" marB="50800" anchor="ctr">
-                    <a:lnL w="0" cap="flat" cmpd="sng" algn="ctr">
+                  <a:tcPr anchor="ctr" marB="50800" marT="50800" marR="0" marL="0">
+                    <a:lnL algn="ctr" cmpd="sng" cap="flat" w="0">
                       <a:noFill/>
                       <a:prstDash val="solid"/>
                     </a:lnL>
-                    <a:lnR w="0" cap="flat" cmpd="sng" algn="ctr">
+                    <a:lnR algn="ctr" cmpd="sng" cap="flat" w="0">
                       <a:noFill/>
                       <a:prstDash val="solid"/>
                     </a:lnR>
-                    <a:lnT w="19050" cap="flat" cmpd="sng" algn="ctr">
-                      <a:solidFill>
-                        <a:srgbClr val="666666"/>
-                      </a:solidFill>
-                      <a:prstDash val="solid"/>
-                      <a:round/>
-                      <a:headEnd type="none" w="med" len="med"/>
-                      <a:tailEnd type="none" w="med" len="med"/>
+                    <a:lnT algn="ctr" cmpd="sng" cap="flat" w="0">
+                      <a:noFill/>
+                      <a:prstDash val="solid"/>
                     </a:lnT>
-                    <a:lnB w="0" cap="flat" cmpd="sng" algn="ctr">
+                    <a:lnB algn="ctr" cmpd="sng" cap="flat" w="0">
                       <a:noFill/>
                       <a:prstDash val="solid"/>
                     </a:lnB>
@@ -2561,11 +2508,6 @@
                     </a:solidFill>
                   </a:tcPr>
                 </a:tc>
-                <a:extLst>
-                  <a:ext uri="{0D108BD9-81ED-4DB2-BD59-A6C34878D82A}">
-                    <a16:rowId xmlns:a16="http://schemas.microsoft.com/office/drawing/2014/main" val="10001"/>
-                  </a:ext>
-                </a:extLst>
               </a:tr>
               <a:tr h="412743">
                 <a:tc>
@@ -2573,7 +2515,7 @@
                     <a:bodyPr/>
                     <a:lstStyle/>
                     <a:p>
-                      <a:pPr marL="50800" marR="50800" algn="l">
+                      <a:pPr algn="l" marL="50800" marR="50800">
                         <a:lnSpc>
                           <a:spcPct val="100000"/>
                         </a:lnSpc>
@@ -2586,7 +2528,7 @@
                         <a:buNone/>
                       </a:pPr>
                       <a:r>
-                        <a:rPr sz="1600" b="0" i="0" u="none" strike="noStrike" cap="none">
+                        <a:rPr cap="none" sz="1600" i="0" b="0" u="none" strike="noStrike">
                           <a:solidFill>
                             <a:srgbClr val="000000">
                               <a:alpha val="100000"/>
@@ -2594,26 +2536,27 @@
                           </a:solidFill>
                           <a:latin typeface="Arial"/>
                           <a:cs typeface="Arial"/>
+                          <a:ea typeface="Arial"/>
                           <a:sym typeface="Arial"/>
                         </a:rPr>
                         <a:t>kra_manioc</a:t>
                       </a:r>
                     </a:p>
                   </a:txBody>
-                  <a:tcPr marL="0" marR="0" marT="50800" marB="50800" anchor="ctr">
-                    <a:lnL w="0" cap="flat" cmpd="sng" algn="ctr">
+                  <a:tcPr anchor="ctr" marB="50800" marT="50800" marR="0" marL="0">
+                    <a:lnL algn="ctr" cmpd="sng" cap="flat" w="0">
                       <a:noFill/>
                       <a:prstDash val="solid"/>
                     </a:lnL>
-                    <a:lnR w="0" cap="flat" cmpd="sng" algn="ctr">
+                    <a:lnR algn="ctr" cmpd="sng" cap="flat" w="0">
                       <a:noFill/>
                       <a:prstDash val="solid"/>
                     </a:lnR>
-                    <a:lnT w="0" cap="flat" cmpd="sng" algn="ctr">
+                    <a:lnT algn="ctr" cmpd="sng" cap="flat" w="0">
                       <a:noFill/>
                       <a:prstDash val="solid"/>
                     </a:lnT>
-                    <a:lnB w="19050" cap="flat" cmpd="sng" algn="ctr">
+                    <a:lnB algn="ctr" cmpd="sng" cap="flat" w="19050">
                       <a:solidFill>
                         <a:srgbClr val="666666">
                           <a:alpha val="100000"/>
@@ -2633,7 +2576,7 @@
                     <a:bodyPr/>
                     <a:lstStyle/>
                     <a:p>
-                      <a:pPr marL="50800" marR="50800" algn="ctr">
+                      <a:pPr algn="ctr" marL="50800" marR="50800">
                         <a:lnSpc>
                           <a:spcPct val="100000"/>
                         </a:lnSpc>
@@ -2646,7 +2589,7 @@
                         <a:buNone/>
                       </a:pPr>
                       <a:r>
-                        <a:rPr sz="1600" b="0" i="0" u="none" strike="noStrike" cap="none">
+                        <a:rPr cap="none" sz="1600" i="0" b="0" u="none" strike="noStrike">
                           <a:solidFill>
                             <a:srgbClr val="000000">
                               <a:alpha val="100000"/>
@@ -2654,26 +2597,27 @@
                           </a:solidFill>
                           <a:latin typeface="Arial"/>
                           <a:cs typeface="Arial"/>
+                          <a:ea typeface="Arial"/>
                           <a:sym typeface="Arial"/>
                         </a:rPr>
                         <a:t>19</a:t>
                       </a:r>
                     </a:p>
                   </a:txBody>
-                  <a:tcPr marL="0" marR="0" marT="50800" marB="50800" anchor="ctr">
-                    <a:lnL w="0" cap="flat" cmpd="sng" algn="ctr">
+                  <a:tcPr anchor="ctr" marB="50800" marT="50800" marR="0" marL="0">
+                    <a:lnL algn="ctr" cmpd="sng" cap="flat" w="0">
                       <a:noFill/>
                       <a:prstDash val="solid"/>
                     </a:lnL>
-                    <a:lnR w="0" cap="flat" cmpd="sng" algn="ctr">
+                    <a:lnR algn="ctr" cmpd="sng" cap="flat" w="0">
                       <a:noFill/>
                       <a:prstDash val="solid"/>
                     </a:lnR>
-                    <a:lnT w="0" cap="flat" cmpd="sng" algn="ctr">
+                    <a:lnT algn="ctr" cmpd="sng" cap="flat" w="0">
                       <a:noFill/>
                       <a:prstDash val="solid"/>
                     </a:lnT>
-                    <a:lnB w="19050" cap="flat" cmpd="sng" algn="ctr">
+                    <a:lnB algn="ctr" cmpd="sng" cap="flat" w="19050">
                       <a:solidFill>
                         <a:srgbClr val="666666">
                           <a:alpha val="100000"/>
@@ -2688,11 +2632,6 @@
                     </a:solidFill>
                   </a:tcPr>
                 </a:tc>
-                <a:extLst>
-                  <a:ext uri="{0D108BD9-81ED-4DB2-BD59-A6C34878D82A}">
-                    <a16:rowId xmlns:a16="http://schemas.microsoft.com/office/drawing/2014/main" val="10002"/>
-                  </a:ext>
-                </a:extLst>
               </a:tr>
             </a:tbl>
           </a:graphicData>
@@ -2700,49 +2639,31 @@
       </p:graphicFrame>
       <p:graphicFrame>
         <p:nvGraphicFramePr>
-          <p:cNvPr id="4" name="Tableau 3"/>
+          <p:cNvPr id="4" name=""/>
           <p:cNvGraphicFramePr>
-            <a:graphicFrameLocks noGrp="1"/>
+            <a:graphicFrameLocks noGrp="true"/>
           </p:cNvGraphicFramePr>
-          <p:nvPr>
-            <p:extLst>
-              <p:ext uri="{D42A27DB-BD31-4B8C-83A1-F6EECF244321}">
-                <p14:modId xmlns:p14="http://schemas.microsoft.com/office/powerpoint/2010/main" val="2388532491"/>
-              </p:ext>
-            </p:extLst>
-          </p:nvPr>
+          <p:nvPr/>
         </p:nvGraphicFramePr>
-        <p:xfrm>
-          <a:off x="1259631" y="2658579"/>
-          <a:ext cx="2155081" cy="1527659"/>
+        <p:xfrm rot="0">
+          <a:off x="4754880" y="1097280"/>
+          <a:ext cx="3840480" cy="2560320"/>
         </p:xfrm>
         <a:graphic>
           <a:graphicData uri="http://schemas.openxmlformats.org/drawingml/2006/table">
             <a:tbl>
               <a:tblPr/>
               <a:tblGrid>
-                <a:gridCol w="1655545">
-                  <a:extLst>
-                    <a:ext uri="{9D8B030D-6E8A-4147-A177-3AD203B41FA5}">
-                      <a16:colId xmlns:a16="http://schemas.microsoft.com/office/drawing/2014/main" val="20000"/>
-                    </a:ext>
-                  </a:extLst>
-                </a:gridCol>
-                <a:gridCol w="499536">
-                  <a:extLst>
-                    <a:ext uri="{9D8B030D-6E8A-4147-A177-3AD203B41FA5}">
-                      <a16:colId xmlns:a16="http://schemas.microsoft.com/office/drawing/2014/main" val="20001"/>
-                    </a:ext>
-                  </a:extLst>
-                </a:gridCol>
+                <a:gridCol w="1649704"/>
+                <a:gridCol w="497774"/>
               </a:tblGrid>
-              <a:tr h="374094">
+              <a:tr h="377322">
                 <a:tc>
                   <a:txBody>
                     <a:bodyPr/>
                     <a:lstStyle/>
                     <a:p>
-                      <a:pPr marL="50800" marR="50800" algn="l">
+                      <a:pPr algn="l" marL="50800" marR="50800">
                         <a:lnSpc>
                           <a:spcPct val="100000"/>
                         </a:lnSpc>
@@ -2755,7 +2676,7 @@
                         <a:buNone/>
                       </a:pPr>
                       <a:r>
-                        <a:rPr sz="1600" b="1" i="0" u="none" strike="noStrike" cap="none" dirty="0">
+                        <a:rPr cap="none" sz="1600" i="0" b="1" u="none" strike="noStrike">
                           <a:solidFill>
                             <a:srgbClr val="000000">
                               <a:alpha val="100000"/>
@@ -2763,45 +2684,23 @@
                           </a:solidFill>
                           <a:latin typeface="Arial"/>
                           <a:cs typeface="Arial"/>
+                          <a:ea typeface="Arial"/>
                           <a:sym typeface="Arial"/>
                         </a:rPr>
-                        <a:t>Couleur </a:t>
+                        <a:t>Couleur racine</a:t>
                       </a:r>
-                      <a:r>
-                        <a:rPr sz="1600" b="1" i="0" u="none" strike="noStrike" cap="none" dirty="0" err="1">
-                          <a:solidFill>
-                            <a:srgbClr val="000000">
-                              <a:alpha val="100000"/>
-                            </a:srgbClr>
-                          </a:solidFill>
-                          <a:latin typeface="Arial"/>
-                          <a:cs typeface="Arial"/>
-                          <a:sym typeface="Arial"/>
-                        </a:rPr>
-                        <a:t>racine</a:t>
-                      </a:r>
-                      <a:endParaRPr sz="1600" b="1" i="0" u="none" strike="noStrike" cap="none" dirty="0">
-                        <a:solidFill>
-                          <a:srgbClr val="000000">
-                            <a:alpha val="100000"/>
-                          </a:srgbClr>
-                        </a:solidFill>
-                        <a:latin typeface="Arial"/>
-                        <a:cs typeface="Arial"/>
-                        <a:sym typeface="Arial"/>
-                      </a:endParaRPr>
                     </a:p>
                   </a:txBody>
-                  <a:tcPr marL="0" marR="0" marT="50800" marB="50800" anchor="ctr">
-                    <a:lnL w="0" cap="flat" cmpd="sng" algn="ctr">
+                  <a:tcPr anchor="ctr" marB="50800" marT="50800" marR="0" marL="0">
+                    <a:lnL algn="ctr" cmpd="sng" cap="flat" w="0">
                       <a:noFill/>
                       <a:prstDash val="solid"/>
                     </a:lnL>
-                    <a:lnR w="0" cap="flat" cmpd="sng" algn="ctr">
+                    <a:lnR algn="ctr" cmpd="sng" cap="flat" w="0">
                       <a:noFill/>
                       <a:prstDash val="solid"/>
                     </a:lnR>
-                    <a:lnT w="19050" cap="flat" cmpd="sng" algn="ctr">
+                    <a:lnT algn="ctr" cmpd="sng" cap="flat" w="19050">
                       <a:solidFill>
                         <a:srgbClr val="666666">
                           <a:alpha val="100000"/>
@@ -2809,7 +2708,7 @@
                       </a:solidFill>
                       <a:prstDash val="solid"/>
                     </a:lnT>
-                    <a:lnB w="19050" cap="flat" cmpd="sng" algn="ctr">
+                    <a:lnB algn="ctr" cmpd="sng" cap="flat" w="19050">
                       <a:solidFill>
                         <a:srgbClr val="666666">
                           <a:alpha val="100000"/>
@@ -2829,7 +2728,7 @@
                     <a:bodyPr/>
                     <a:lstStyle/>
                     <a:p>
-                      <a:pPr marL="50800" marR="50800" algn="ctr">
+                      <a:pPr algn="ctr" marL="50800" marR="50800">
                         <a:lnSpc>
                           <a:spcPct val="100000"/>
                         </a:lnSpc>
@@ -2842,7 +2741,7 @@
                         <a:buNone/>
                       </a:pPr>
                       <a:r>
-                        <a:rPr sz="1600" b="1" i="0" u="none" strike="noStrike" cap="none">
+                        <a:rPr cap="none" sz="1600" i="0" b="1" u="none" strike="noStrike">
                           <a:solidFill>
                             <a:srgbClr val="000000">
                               <a:alpha val="100000"/>
@@ -2850,22 +2749,23 @@
                           </a:solidFill>
                           <a:latin typeface="Arial"/>
                           <a:cs typeface="Arial"/>
+                          <a:ea typeface="Arial"/>
                           <a:sym typeface="Arial"/>
                         </a:rPr>
                         <a:t>Nb</a:t>
                       </a:r>
                     </a:p>
                   </a:txBody>
-                  <a:tcPr marL="0" marR="0" marT="50800" marB="50800" anchor="ctr">
-                    <a:lnL w="0" cap="flat" cmpd="sng" algn="ctr">
+                  <a:tcPr anchor="ctr" marB="50800" marT="50800" marR="0" marL="0">
+                    <a:lnL algn="ctr" cmpd="sng" cap="flat" w="0">
                       <a:noFill/>
                       <a:prstDash val="solid"/>
                     </a:lnL>
-                    <a:lnR w="0" cap="flat" cmpd="sng" algn="ctr">
+                    <a:lnR algn="ctr" cmpd="sng" cap="flat" w="0">
                       <a:noFill/>
                       <a:prstDash val="solid"/>
                     </a:lnR>
-                    <a:lnT w="19050" cap="flat" cmpd="sng" algn="ctr">
+                    <a:lnT algn="ctr" cmpd="sng" cap="flat" w="19050">
                       <a:solidFill>
                         <a:srgbClr val="666666">
                           <a:alpha val="100000"/>
@@ -2873,7 +2773,7 @@
                       </a:solidFill>
                       <a:prstDash val="solid"/>
                     </a:lnT>
-                    <a:lnB w="19050" cap="flat" cmpd="sng" algn="ctr">
+                    <a:lnB algn="ctr" cmpd="sng" cap="flat" w="19050">
                       <a:solidFill>
                         <a:srgbClr val="666666">
                           <a:alpha val="100000"/>
@@ -2888,19 +2788,14 @@
                     </a:solidFill>
                   </a:tcPr>
                 </a:tc>
-                <a:extLst>
-                  <a:ext uri="{0D108BD9-81ED-4DB2-BD59-A6C34878D82A}">
-                    <a16:rowId xmlns:a16="http://schemas.microsoft.com/office/drawing/2014/main" val="10000"/>
-                  </a:ext>
-                </a:extLst>
               </a:tr>
-              <a:tr h="411574">
+              <a:tr h="415125">
                 <a:tc>
                   <a:txBody>
                     <a:bodyPr/>
                     <a:lstStyle/>
                     <a:p>
-                      <a:pPr marL="50800" marR="50800" algn="l">
+                      <a:pPr algn="l" marL="50800" marR="50800">
                         <a:lnSpc>
                           <a:spcPct val="100000"/>
                         </a:lnSpc>
@@ -2913,7 +2808,7 @@
                         <a:buNone/>
                       </a:pPr>
                       <a:r>
-                        <a:rPr sz="1600" b="0" i="0" u="none" strike="noStrike" cap="none" dirty="0">
+                        <a:rPr cap="none" sz="1600" i="0" b="0" u="none" strike="noStrike">
                           <a:solidFill>
                             <a:srgbClr val="000000">
                               <a:alpha val="100000"/>
@@ -2921,31 +2816,27 @@
                           </a:solidFill>
                           <a:latin typeface="Arial"/>
                           <a:cs typeface="Arial"/>
+                          <a:ea typeface="Arial"/>
                           <a:sym typeface="Arial"/>
                         </a:rPr>
                         <a:t>jaune</a:t>
                       </a:r>
                     </a:p>
                   </a:txBody>
-                  <a:tcPr marL="0" marR="0" marT="50800" marB="50800" anchor="ctr">
-                    <a:lnL w="0" cap="flat" cmpd="sng" algn="ctr">
+                  <a:tcPr anchor="ctr" marB="50800" marT="50800" marR="0" marL="0">
+                    <a:lnL algn="ctr" cmpd="sng" cap="flat" w="0">
                       <a:noFill/>
                       <a:prstDash val="solid"/>
                     </a:lnL>
-                    <a:lnR w="0" cap="flat" cmpd="sng" algn="ctr">
+                    <a:lnR algn="ctr" cmpd="sng" cap="flat" w="0">
                       <a:noFill/>
                       <a:prstDash val="solid"/>
                     </a:lnR>
-                    <a:lnT w="19050" cap="flat" cmpd="sng" algn="ctr">
-                      <a:solidFill>
-                        <a:srgbClr val="666666"/>
-                      </a:solidFill>
-                      <a:prstDash val="solid"/>
-                      <a:round/>
-                      <a:headEnd type="none" w="med" len="med"/>
-                      <a:tailEnd type="none" w="med" len="med"/>
+                    <a:lnT algn="ctr" cmpd="sng" cap="flat" w="0">
+                      <a:noFill/>
+                      <a:prstDash val="solid"/>
                     </a:lnT>
-                    <a:lnB w="0" cap="flat" cmpd="sng" algn="ctr">
+                    <a:lnB algn="ctr" cmpd="sng" cap="flat" w="0">
                       <a:noFill/>
                       <a:prstDash val="solid"/>
                     </a:lnB>
@@ -2961,7 +2852,7 @@
                     <a:bodyPr/>
                     <a:lstStyle/>
                     <a:p>
-                      <a:pPr marL="50800" marR="50800" algn="ctr">
+                      <a:pPr algn="ctr" marL="50800" marR="50800">
                         <a:lnSpc>
                           <a:spcPct val="100000"/>
                         </a:lnSpc>
@@ -2974,7 +2865,7 @@
                         <a:buNone/>
                       </a:pPr>
                       <a:r>
-                        <a:rPr sz="1600" b="0" i="0" u="none" strike="noStrike" cap="none" dirty="0">
+                        <a:rPr cap="none" sz="1600" i="0" b="0" u="none" strike="noStrike">
                           <a:solidFill>
                             <a:srgbClr val="000000">
                               <a:alpha val="100000"/>
@@ -2982,31 +2873,27 @@
                           </a:solidFill>
                           <a:latin typeface="Arial"/>
                           <a:cs typeface="Arial"/>
+                          <a:ea typeface="Arial"/>
                           <a:sym typeface="Arial"/>
                         </a:rPr>
-                        <a:t>21</a:t>
+                        <a:t>25</a:t>
                       </a:r>
                     </a:p>
                   </a:txBody>
-                  <a:tcPr marL="0" marR="0" marT="50800" marB="50800" anchor="ctr">
-                    <a:lnL w="0" cap="flat" cmpd="sng" algn="ctr">
+                  <a:tcPr anchor="ctr" marB="50800" marT="50800" marR="0" marL="0">
+                    <a:lnL algn="ctr" cmpd="sng" cap="flat" w="0">
                       <a:noFill/>
                       <a:prstDash val="solid"/>
                     </a:lnL>
-                    <a:lnR w="0" cap="flat" cmpd="sng" algn="ctr">
+                    <a:lnR algn="ctr" cmpd="sng" cap="flat" w="0">
                       <a:noFill/>
                       <a:prstDash val="solid"/>
                     </a:lnR>
-                    <a:lnT w="19050" cap="flat" cmpd="sng" algn="ctr">
-                      <a:solidFill>
-                        <a:srgbClr val="666666"/>
-                      </a:solidFill>
-                      <a:prstDash val="solid"/>
-                      <a:round/>
-                      <a:headEnd type="none" w="med" len="med"/>
-                      <a:tailEnd type="none" w="med" len="med"/>
+                    <a:lnT algn="ctr" cmpd="sng" cap="flat" w="0">
+                      <a:noFill/>
+                      <a:prstDash val="solid"/>
                     </a:lnT>
-                    <a:lnB w="0" cap="flat" cmpd="sng" algn="ctr">
+                    <a:lnB algn="ctr" cmpd="sng" cap="flat" w="0">
                       <a:noFill/>
                       <a:prstDash val="solid"/>
                     </a:lnB>
@@ -3017,19 +2904,14 @@
                     </a:solidFill>
                   </a:tcPr>
                 </a:tc>
-                <a:extLst>
-                  <a:ext uri="{0D108BD9-81ED-4DB2-BD59-A6C34878D82A}">
-                    <a16:rowId xmlns:a16="http://schemas.microsoft.com/office/drawing/2014/main" val="10001"/>
-                  </a:ext>
-                </a:extLst>
               </a:tr>
-              <a:tr h="372225">
+              <a:tr h="375437">
                 <a:tc>
                   <a:txBody>
                     <a:bodyPr/>
                     <a:lstStyle/>
                     <a:p>
-                      <a:pPr marL="50800" marR="50800" algn="l">
+                      <a:pPr algn="l" marL="50800" marR="50800">
                         <a:lnSpc>
                           <a:spcPct val="100000"/>
                         </a:lnSpc>
@@ -3042,7 +2924,7 @@
                         <a:buNone/>
                       </a:pPr>
                       <a:r>
-                        <a:rPr sz="1600" b="0" i="0" u="none" strike="noStrike" cap="none">
+                        <a:rPr cap="none" sz="1600" i="0" b="0" u="none" strike="noStrike">
                           <a:solidFill>
                             <a:srgbClr val="000000">
                               <a:alpha val="100000"/>
@@ -3050,26 +2932,27 @@
                           </a:solidFill>
                           <a:latin typeface="Arial"/>
                           <a:cs typeface="Arial"/>
+                          <a:ea typeface="Arial"/>
                           <a:sym typeface="Arial"/>
                         </a:rPr>
                         <a:t>blanc</a:t>
                       </a:r>
                     </a:p>
                   </a:txBody>
-                  <a:tcPr marL="0" marR="0" marT="50800" marB="50800" anchor="ctr">
-                    <a:lnL w="0" cap="flat" cmpd="sng" algn="ctr">
+                  <a:tcPr anchor="ctr" marB="50800" marT="50800" marR="0" marL="0">
+                    <a:lnL algn="ctr" cmpd="sng" cap="flat" w="0">
                       <a:noFill/>
                       <a:prstDash val="solid"/>
                     </a:lnL>
-                    <a:lnR w="0" cap="flat" cmpd="sng" algn="ctr">
+                    <a:lnR algn="ctr" cmpd="sng" cap="flat" w="0">
                       <a:noFill/>
                       <a:prstDash val="solid"/>
                     </a:lnR>
-                    <a:lnT w="0" cap="flat" cmpd="sng" algn="ctr">
+                    <a:lnT algn="ctr" cmpd="sng" cap="flat" w="0">
                       <a:noFill/>
                       <a:prstDash val="solid"/>
                     </a:lnT>
-                    <a:lnB w="0" cap="flat" cmpd="sng" algn="ctr">
+                    <a:lnB algn="ctr" cmpd="sng" cap="flat" w="0">
                       <a:noFill/>
                       <a:prstDash val="solid"/>
                     </a:lnB>
@@ -3085,7 +2968,7 @@
                     <a:bodyPr/>
                     <a:lstStyle/>
                     <a:p>
-                      <a:pPr marL="50800" marR="50800" algn="ctr">
+                      <a:pPr algn="ctr" marL="50800" marR="50800">
                         <a:lnSpc>
                           <a:spcPct val="100000"/>
                         </a:lnSpc>
@@ -3098,7 +2981,7 @@
                         <a:buNone/>
                       </a:pPr>
                       <a:r>
-                        <a:rPr sz="1600" b="0" i="0" u="none" strike="noStrike" cap="none">
+                        <a:rPr cap="none" sz="1600" i="0" b="0" u="none" strike="noStrike">
                           <a:solidFill>
                             <a:srgbClr val="000000">
                               <a:alpha val="100000"/>
@@ -3106,26 +2989,27 @@
                           </a:solidFill>
                           <a:latin typeface="Arial"/>
                           <a:cs typeface="Arial"/>
+                          <a:ea typeface="Arial"/>
                           <a:sym typeface="Arial"/>
                         </a:rPr>
                         <a:t>18</a:t>
                       </a:r>
                     </a:p>
                   </a:txBody>
-                  <a:tcPr marL="0" marR="0" marT="50800" marB="50800" anchor="ctr">
-                    <a:lnL w="0" cap="flat" cmpd="sng" algn="ctr">
+                  <a:tcPr anchor="ctr" marB="50800" marT="50800" marR="0" marL="0">
+                    <a:lnL algn="ctr" cmpd="sng" cap="flat" w="0">
                       <a:noFill/>
                       <a:prstDash val="solid"/>
                     </a:lnL>
-                    <a:lnR w="0" cap="flat" cmpd="sng" algn="ctr">
+                    <a:lnR algn="ctr" cmpd="sng" cap="flat" w="0">
                       <a:noFill/>
                       <a:prstDash val="solid"/>
                     </a:lnR>
-                    <a:lnT w="0" cap="flat" cmpd="sng" algn="ctr">
+                    <a:lnT algn="ctr" cmpd="sng" cap="flat" w="0">
                       <a:noFill/>
                       <a:prstDash val="solid"/>
                     </a:lnT>
-                    <a:lnB w="0" cap="flat" cmpd="sng" algn="ctr">
+                    <a:lnB algn="ctr" cmpd="sng" cap="flat" w="0">
                       <a:noFill/>
                       <a:prstDash val="solid"/>
                     </a:lnB>
@@ -3136,19 +3020,14 @@
                     </a:solidFill>
                   </a:tcPr>
                 </a:tc>
-                <a:extLst>
-                  <a:ext uri="{0D108BD9-81ED-4DB2-BD59-A6C34878D82A}">
-                    <a16:rowId xmlns:a16="http://schemas.microsoft.com/office/drawing/2014/main" val="10002"/>
-                  </a:ext>
-                </a:extLst>
               </a:tr>
-              <a:tr h="369766">
+              <a:tr h="372957">
                 <a:tc>
                   <a:txBody>
                     <a:bodyPr/>
                     <a:lstStyle/>
                     <a:p>
-                      <a:pPr marL="50800" marR="50800" algn="l">
+                      <a:pPr algn="l" marL="50800" marR="50800">
                         <a:lnSpc>
                           <a:spcPct val="100000"/>
                         </a:lnSpc>
@@ -3161,7 +3040,7 @@
                         <a:buNone/>
                       </a:pPr>
                       <a:r>
-                        <a:rPr sz="1600" b="0" i="0" u="none" strike="noStrike" cap="none">
+                        <a:rPr cap="none" sz="1600" i="0" b="0" u="none" strike="noStrike">
                           <a:solidFill>
                             <a:srgbClr val="000000">
                               <a:alpha val="100000"/>
@@ -3169,26 +3048,27 @@
                           </a:solidFill>
                           <a:latin typeface="Arial"/>
                           <a:cs typeface="Arial"/>
+                          <a:ea typeface="Arial"/>
                           <a:sym typeface="Arial"/>
                         </a:rPr>
                         <a:t>creme</a:t>
                       </a:r>
                     </a:p>
                   </a:txBody>
-                  <a:tcPr marL="0" marR="0" marT="50800" marB="50800" anchor="ctr">
-                    <a:lnL w="0" cap="flat" cmpd="sng" algn="ctr">
+                  <a:tcPr anchor="ctr" marB="50800" marT="50800" marR="0" marL="0">
+                    <a:lnL algn="ctr" cmpd="sng" cap="flat" w="0">
                       <a:noFill/>
                       <a:prstDash val="solid"/>
                     </a:lnL>
-                    <a:lnR w="0" cap="flat" cmpd="sng" algn="ctr">
+                    <a:lnR algn="ctr" cmpd="sng" cap="flat" w="0">
                       <a:noFill/>
                       <a:prstDash val="solid"/>
                     </a:lnR>
-                    <a:lnT w="0" cap="flat" cmpd="sng" algn="ctr">
+                    <a:lnT algn="ctr" cmpd="sng" cap="flat" w="0">
                       <a:noFill/>
                       <a:prstDash val="solid"/>
                     </a:lnT>
-                    <a:lnB w="19050" cap="flat" cmpd="sng" algn="ctr">
+                    <a:lnB algn="ctr" cmpd="sng" cap="flat" w="19050">
                       <a:solidFill>
                         <a:srgbClr val="666666">
                           <a:alpha val="100000"/>
@@ -3208,7 +3088,7 @@
                     <a:bodyPr/>
                     <a:lstStyle/>
                     <a:p>
-                      <a:pPr marL="50800" marR="50800" algn="ctr">
+                      <a:pPr algn="ctr" marL="50800" marR="50800">
                         <a:lnSpc>
                           <a:spcPct val="100000"/>
                         </a:lnSpc>
@@ -3221,7 +3101,7 @@
                         <a:buNone/>
                       </a:pPr>
                       <a:r>
-                        <a:rPr sz="1600" b="0" i="0" u="none" strike="noStrike" cap="none" dirty="0">
+                        <a:rPr cap="none" sz="1600" i="0" b="0" u="none" strike="noStrike">
                           <a:solidFill>
                             <a:srgbClr val="000000">
                               <a:alpha val="100000"/>
@@ -3229,26 +3109,27 @@
                           </a:solidFill>
                           <a:latin typeface="Arial"/>
                           <a:cs typeface="Arial"/>
+                          <a:ea typeface="Arial"/>
                           <a:sym typeface="Arial"/>
                         </a:rPr>
                         <a:t>2</a:t>
                       </a:r>
                     </a:p>
                   </a:txBody>
-                  <a:tcPr marL="0" marR="0" marT="50800" marB="50800" anchor="ctr">
-                    <a:lnL w="0" cap="flat" cmpd="sng" algn="ctr">
+                  <a:tcPr anchor="ctr" marB="50800" marT="50800" marR="0" marL="0">
+                    <a:lnL algn="ctr" cmpd="sng" cap="flat" w="0">
                       <a:noFill/>
                       <a:prstDash val="solid"/>
                     </a:lnL>
-                    <a:lnR w="0" cap="flat" cmpd="sng" algn="ctr">
+                    <a:lnR algn="ctr" cmpd="sng" cap="flat" w="0">
                       <a:noFill/>
                       <a:prstDash val="solid"/>
                     </a:lnR>
-                    <a:lnT w="0" cap="flat" cmpd="sng" algn="ctr">
+                    <a:lnT algn="ctr" cmpd="sng" cap="flat" w="0">
                       <a:noFill/>
                       <a:prstDash val="solid"/>
                     </a:lnT>
-                    <a:lnB w="19050" cap="flat" cmpd="sng" algn="ctr">
+                    <a:lnB algn="ctr" cmpd="sng" cap="flat" w="19050">
                       <a:solidFill>
                         <a:srgbClr val="666666">
                           <a:alpha val="100000"/>
@@ -3263,11 +3144,6 @@
                     </a:solidFill>
                   </a:tcPr>
                 </a:tc>
-                <a:extLst>
-                  <a:ext uri="{0D108BD9-81ED-4DB2-BD59-A6C34878D82A}">
-                    <a16:rowId xmlns:a16="http://schemas.microsoft.com/office/drawing/2014/main" val="10003"/>
-                  </a:ext>
-                </a:extLst>
               </a:tr>
             </a:tbl>
           </a:graphicData>
@@ -3275,41 +3151,23 @@
       </p:graphicFrame>
       <p:graphicFrame>
         <p:nvGraphicFramePr>
-          <p:cNvPr id="5" name="Tableau 4"/>
+          <p:cNvPr id="5" name=""/>
           <p:cNvGraphicFramePr>
-            <a:graphicFrameLocks noGrp="1"/>
+            <a:graphicFrameLocks noGrp="true"/>
           </p:cNvGraphicFramePr>
-          <p:nvPr>
-            <p:extLst>
-              <p:ext uri="{D42A27DB-BD31-4B8C-83A1-F6EECF244321}">
-                <p14:modId xmlns:p14="http://schemas.microsoft.com/office/powerpoint/2010/main" val="3409592897"/>
-              </p:ext>
-            </p:extLst>
-          </p:nvPr>
+          <p:nvPr/>
         </p:nvGraphicFramePr>
-        <p:xfrm>
-          <a:off x="1260798" y="4577742"/>
-          <a:ext cx="2022958" cy="1543321"/>
+        <p:xfrm rot="0">
+          <a:off x="457200" y="3840480"/>
+          <a:ext cx="3840480" cy="2560320"/>
         </p:xfrm>
         <a:graphic>
           <a:graphicData uri="http://schemas.openxmlformats.org/drawingml/2006/table">
             <a:tbl>
               <a:tblPr/>
               <a:tblGrid>
-                <a:gridCol w="1525184">
-                  <a:extLst>
-                    <a:ext uri="{9D8B030D-6E8A-4147-A177-3AD203B41FA5}">
-                      <a16:colId xmlns:a16="http://schemas.microsoft.com/office/drawing/2014/main" val="20000"/>
-                    </a:ext>
-                  </a:extLst>
-                </a:gridCol>
-                <a:gridCol w="497774">
-                  <a:extLst>
-                    <a:ext uri="{9D8B030D-6E8A-4147-A177-3AD203B41FA5}">
-                      <a16:colId xmlns:a16="http://schemas.microsoft.com/office/drawing/2014/main" val="20001"/>
-                    </a:ext>
-                  </a:extLst>
-                </a:gridCol>
+                <a:gridCol w="1525184"/>
+                <a:gridCol w="497774"/>
               </a:tblGrid>
               <a:tr h="377322">
                 <a:tc>
@@ -3317,7 +3175,7 @@
                     <a:bodyPr/>
                     <a:lstStyle/>
                     <a:p>
-                      <a:pPr marL="50800" marR="50800" algn="l">
+                      <a:pPr algn="l" marL="50800" marR="50800">
                         <a:lnSpc>
                           <a:spcPct val="100000"/>
                         </a:lnSpc>
@@ -3330,7 +3188,7 @@
                         <a:buNone/>
                       </a:pPr>
                       <a:r>
-                        <a:rPr sz="1600" b="1" i="0" u="none" strike="noStrike" cap="none">
+                        <a:rPr cap="none" sz="1600" i="0" b="1" u="none" strike="noStrike">
                           <a:solidFill>
                             <a:srgbClr val="000000">
                               <a:alpha val="100000"/>
@@ -3338,22 +3196,23 @@
                           </a:solidFill>
                           <a:latin typeface="Arial"/>
                           <a:cs typeface="Arial"/>
+                          <a:ea typeface="Arial"/>
                           <a:sym typeface="Arial"/>
                         </a:rPr>
                         <a:t>Communauté</a:t>
                       </a:r>
                     </a:p>
                   </a:txBody>
-                  <a:tcPr marL="0" marR="0" marT="50800" marB="50800" anchor="ctr">
-                    <a:lnL w="0" cap="flat" cmpd="sng" algn="ctr">
+                  <a:tcPr anchor="ctr" marB="50800" marT="50800" marR="0" marL="0">
+                    <a:lnL algn="ctr" cmpd="sng" cap="flat" w="0">
                       <a:noFill/>
                       <a:prstDash val="solid"/>
                     </a:lnL>
-                    <a:lnR w="0" cap="flat" cmpd="sng" algn="ctr">
+                    <a:lnR algn="ctr" cmpd="sng" cap="flat" w="0">
                       <a:noFill/>
                       <a:prstDash val="solid"/>
                     </a:lnR>
-                    <a:lnT w="19050" cap="flat" cmpd="sng" algn="ctr">
+                    <a:lnT algn="ctr" cmpd="sng" cap="flat" w="19050">
                       <a:solidFill>
                         <a:srgbClr val="666666">
                           <a:alpha val="100000"/>
@@ -3361,7 +3220,7 @@
                       </a:solidFill>
                       <a:prstDash val="solid"/>
                     </a:lnT>
-                    <a:lnB w="19050" cap="flat" cmpd="sng" algn="ctr">
+                    <a:lnB algn="ctr" cmpd="sng" cap="flat" w="19050">
                       <a:solidFill>
                         <a:srgbClr val="666666">
                           <a:alpha val="100000"/>
@@ -3381,7 +3240,7 @@
                     <a:bodyPr/>
                     <a:lstStyle/>
                     <a:p>
-                      <a:pPr marL="50800" marR="50800" algn="ctr">
+                      <a:pPr algn="ctr" marL="50800" marR="50800">
                         <a:lnSpc>
                           <a:spcPct val="100000"/>
                         </a:lnSpc>
@@ -3394,7 +3253,7 @@
                         <a:buNone/>
                       </a:pPr>
                       <a:r>
-                        <a:rPr sz="1600" b="1" i="0" u="none" strike="noStrike" cap="none">
+                        <a:rPr cap="none" sz="1600" i="0" b="1" u="none" strike="noStrike">
                           <a:solidFill>
                             <a:srgbClr val="000000">
                               <a:alpha val="100000"/>
@@ -3402,22 +3261,23 @@
                           </a:solidFill>
                           <a:latin typeface="Arial"/>
                           <a:cs typeface="Arial"/>
+                          <a:ea typeface="Arial"/>
                           <a:sym typeface="Arial"/>
                         </a:rPr>
                         <a:t>Nb</a:t>
                       </a:r>
                     </a:p>
                   </a:txBody>
-                  <a:tcPr marL="0" marR="0" marT="50800" marB="50800" anchor="ctr">
-                    <a:lnL w="0" cap="flat" cmpd="sng" algn="ctr">
+                  <a:tcPr anchor="ctr" marB="50800" marT="50800" marR="0" marL="0">
+                    <a:lnL algn="ctr" cmpd="sng" cap="flat" w="0">
                       <a:noFill/>
                       <a:prstDash val="solid"/>
                     </a:lnL>
-                    <a:lnR w="0" cap="flat" cmpd="sng" algn="ctr">
+                    <a:lnR algn="ctr" cmpd="sng" cap="flat" w="0">
                       <a:noFill/>
                       <a:prstDash val="solid"/>
                     </a:lnR>
-                    <a:lnT w="19050" cap="flat" cmpd="sng" algn="ctr">
+                    <a:lnT algn="ctr" cmpd="sng" cap="flat" w="19050">
                       <a:solidFill>
                         <a:srgbClr val="666666">
                           <a:alpha val="100000"/>
@@ -3425,7 +3285,7 @@
                       </a:solidFill>
                       <a:prstDash val="solid"/>
                     </a:lnT>
-                    <a:lnB w="19050" cap="flat" cmpd="sng" algn="ctr">
+                    <a:lnB algn="ctr" cmpd="sng" cap="flat" w="19050">
                       <a:solidFill>
                         <a:srgbClr val="666666">
                           <a:alpha val="100000"/>
@@ -3440,11 +3300,6 @@
                     </a:solidFill>
                   </a:tcPr>
                 </a:tc>
-                <a:extLst>
-                  <a:ext uri="{0D108BD9-81ED-4DB2-BD59-A6C34878D82A}">
-                    <a16:rowId xmlns:a16="http://schemas.microsoft.com/office/drawing/2014/main" val="10000"/>
-                  </a:ext>
-                </a:extLst>
               </a:tr>
               <a:tr h="415125">
                 <a:tc>
@@ -3452,7 +3307,7 @@
                     <a:bodyPr/>
                     <a:lstStyle/>
                     <a:p>
-                      <a:pPr marL="50800" marR="50800" algn="l">
+                      <a:pPr algn="l" marL="50800" marR="50800">
                         <a:lnSpc>
                           <a:spcPct val="100000"/>
                         </a:lnSpc>
@@ -3465,7 +3320,7 @@
                         <a:buNone/>
                       </a:pPr>
                       <a:r>
-                        <a:rPr sz="1600" b="0" i="0" u="none" strike="noStrike" cap="none" dirty="0" err="1">
+                        <a:rPr cap="none" sz="1600" i="0" b="0" u="none" strike="noStrike">
                           <a:solidFill>
                             <a:srgbClr val="000000">
                               <a:alpha val="100000"/>
@@ -3473,41 +3328,27 @@
                           </a:solidFill>
                           <a:latin typeface="Arial"/>
                           <a:cs typeface="Arial"/>
+                          <a:ea typeface="Arial"/>
                           <a:sym typeface="Arial"/>
                         </a:rPr>
                         <a:t>bushinengues</a:t>
                       </a:r>
-                      <a:endParaRPr sz="1600" b="0" i="0" u="none" strike="noStrike" cap="none" dirty="0">
-                        <a:solidFill>
-                          <a:srgbClr val="000000">
-                            <a:alpha val="100000"/>
-                          </a:srgbClr>
-                        </a:solidFill>
-                        <a:latin typeface="Arial"/>
-                        <a:cs typeface="Arial"/>
-                        <a:sym typeface="Arial"/>
-                      </a:endParaRPr>
                     </a:p>
                   </a:txBody>
-                  <a:tcPr marL="0" marR="0" marT="50800" marB="50800" anchor="ctr">
-                    <a:lnL w="0" cap="flat" cmpd="sng" algn="ctr">
+                  <a:tcPr anchor="ctr" marB="50800" marT="50800" marR="0" marL="0">
+                    <a:lnL algn="ctr" cmpd="sng" cap="flat" w="0">
                       <a:noFill/>
                       <a:prstDash val="solid"/>
                     </a:lnL>
-                    <a:lnR w="0" cap="flat" cmpd="sng" algn="ctr">
+                    <a:lnR algn="ctr" cmpd="sng" cap="flat" w="0">
                       <a:noFill/>
                       <a:prstDash val="solid"/>
                     </a:lnR>
-                    <a:lnT w="19050" cap="flat" cmpd="sng" algn="ctr">
-                      <a:solidFill>
-                        <a:srgbClr val="666666"/>
-                      </a:solidFill>
-                      <a:prstDash val="solid"/>
-                      <a:round/>
-                      <a:headEnd type="none" w="med" len="med"/>
-                      <a:tailEnd type="none" w="med" len="med"/>
+                    <a:lnT algn="ctr" cmpd="sng" cap="flat" w="0">
+                      <a:noFill/>
+                      <a:prstDash val="solid"/>
                     </a:lnT>
-                    <a:lnB w="0" cap="flat" cmpd="sng" algn="ctr">
+                    <a:lnB algn="ctr" cmpd="sng" cap="flat" w="0">
                       <a:noFill/>
                       <a:prstDash val="solid"/>
                     </a:lnB>
@@ -3523,7 +3364,7 @@
                     <a:bodyPr/>
                     <a:lstStyle/>
                     <a:p>
-                      <a:pPr marL="50800" marR="50800" algn="ctr">
+                      <a:pPr algn="ctr" marL="50800" marR="50800">
                         <a:lnSpc>
                           <a:spcPct val="100000"/>
                         </a:lnSpc>
@@ -3536,7 +3377,7 @@
                         <a:buNone/>
                       </a:pPr>
                       <a:r>
-                        <a:rPr sz="1600" b="0" i="0" u="none" strike="noStrike" cap="none">
+                        <a:rPr cap="none" sz="1600" i="0" b="0" u="none" strike="noStrike">
                           <a:solidFill>
                             <a:srgbClr val="000000">
                               <a:alpha val="100000"/>
@@ -3544,31 +3385,27 @@
                           </a:solidFill>
                           <a:latin typeface="Arial"/>
                           <a:cs typeface="Arial"/>
+                          <a:ea typeface="Arial"/>
                           <a:sym typeface="Arial"/>
                         </a:rPr>
                         <a:t>35</a:t>
                       </a:r>
                     </a:p>
                   </a:txBody>
-                  <a:tcPr marL="0" marR="0" marT="50800" marB="50800" anchor="ctr">
-                    <a:lnL w="0" cap="flat" cmpd="sng" algn="ctr">
+                  <a:tcPr anchor="ctr" marB="50800" marT="50800" marR="0" marL="0">
+                    <a:lnL algn="ctr" cmpd="sng" cap="flat" w="0">
                       <a:noFill/>
                       <a:prstDash val="solid"/>
                     </a:lnL>
-                    <a:lnR w="0" cap="flat" cmpd="sng" algn="ctr">
+                    <a:lnR algn="ctr" cmpd="sng" cap="flat" w="0">
                       <a:noFill/>
                       <a:prstDash val="solid"/>
                     </a:lnR>
-                    <a:lnT w="19050" cap="flat" cmpd="sng" algn="ctr">
-                      <a:solidFill>
-                        <a:srgbClr val="666666"/>
-                      </a:solidFill>
-                      <a:prstDash val="solid"/>
-                      <a:round/>
-                      <a:headEnd type="none" w="med" len="med"/>
-                      <a:tailEnd type="none" w="med" len="med"/>
+                    <a:lnT algn="ctr" cmpd="sng" cap="flat" w="0">
+                      <a:noFill/>
+                      <a:prstDash val="solid"/>
                     </a:lnT>
-                    <a:lnB w="0" cap="flat" cmpd="sng" algn="ctr">
+                    <a:lnB algn="ctr" cmpd="sng" cap="flat" w="0">
                       <a:noFill/>
                       <a:prstDash val="solid"/>
                     </a:lnB>
@@ -3579,11 +3416,6 @@
                     </a:solidFill>
                   </a:tcPr>
                 </a:tc>
-                <a:extLst>
-                  <a:ext uri="{0D108BD9-81ED-4DB2-BD59-A6C34878D82A}">
-                    <a16:rowId xmlns:a16="http://schemas.microsoft.com/office/drawing/2014/main" val="10001"/>
-                  </a:ext>
-                </a:extLst>
               </a:tr>
               <a:tr h="375437">
                 <a:tc>
@@ -3591,7 +3423,7 @@
                     <a:bodyPr/>
                     <a:lstStyle/>
                     <a:p>
-                      <a:pPr marL="50800" marR="50800" algn="l">
+                      <a:pPr algn="l" marL="50800" marR="50800">
                         <a:lnSpc>
                           <a:spcPct val="100000"/>
                         </a:lnSpc>
@@ -3604,7 +3436,7 @@
                         <a:buNone/>
                       </a:pPr>
                       <a:r>
-                        <a:rPr sz="1600" b="0" i="0" u="none" strike="noStrike" cap="none">
+                        <a:rPr cap="none" sz="1600" i="0" b="0" u="none" strike="noStrike">
                           <a:solidFill>
                             <a:srgbClr val="000000">
                               <a:alpha val="100000"/>
@@ -3612,26 +3444,27 @@
                           </a:solidFill>
                           <a:latin typeface="Arial"/>
                           <a:cs typeface="Arial"/>
+                          <a:ea typeface="Arial"/>
                           <a:sym typeface="Arial"/>
                         </a:rPr>
                         <a:t>amerindien</a:t>
                       </a:r>
                     </a:p>
                   </a:txBody>
-                  <a:tcPr marL="0" marR="0" marT="50800" marB="50800" anchor="ctr">
-                    <a:lnL w="0" cap="flat" cmpd="sng" algn="ctr">
+                  <a:tcPr anchor="ctr" marB="50800" marT="50800" marR="0" marL="0">
+                    <a:lnL algn="ctr" cmpd="sng" cap="flat" w="0">
                       <a:noFill/>
                       <a:prstDash val="solid"/>
                     </a:lnL>
-                    <a:lnR w="0" cap="flat" cmpd="sng" algn="ctr">
+                    <a:lnR algn="ctr" cmpd="sng" cap="flat" w="0">
                       <a:noFill/>
                       <a:prstDash val="solid"/>
                     </a:lnR>
-                    <a:lnT w="0" cap="flat" cmpd="sng" algn="ctr">
+                    <a:lnT algn="ctr" cmpd="sng" cap="flat" w="0">
                       <a:noFill/>
                       <a:prstDash val="solid"/>
                     </a:lnT>
-                    <a:lnB w="0" cap="flat" cmpd="sng" algn="ctr">
+                    <a:lnB algn="ctr" cmpd="sng" cap="flat" w="0">
                       <a:noFill/>
                       <a:prstDash val="solid"/>
                     </a:lnB>
@@ -3647,7 +3480,7 @@
                     <a:bodyPr/>
                     <a:lstStyle/>
                     <a:p>
-                      <a:pPr marL="50800" marR="50800" algn="ctr">
+                      <a:pPr algn="ctr" marL="50800" marR="50800">
                         <a:lnSpc>
                           <a:spcPct val="100000"/>
                         </a:lnSpc>
@@ -3660,7 +3493,7 @@
                         <a:buNone/>
                       </a:pPr>
                       <a:r>
-                        <a:rPr sz="1600" b="0" i="0" u="none" strike="noStrike" cap="none">
+                        <a:rPr cap="none" sz="1600" i="0" b="0" u="none" strike="noStrike">
                           <a:solidFill>
                             <a:srgbClr val="000000">
                               <a:alpha val="100000"/>
@@ -3668,26 +3501,27 @@
                           </a:solidFill>
                           <a:latin typeface="Arial"/>
                           <a:cs typeface="Arial"/>
+                          <a:ea typeface="Arial"/>
                           <a:sym typeface="Arial"/>
                         </a:rPr>
                         <a:t>25</a:t>
                       </a:r>
                     </a:p>
                   </a:txBody>
-                  <a:tcPr marL="0" marR="0" marT="50800" marB="50800" anchor="ctr">
-                    <a:lnL w="0" cap="flat" cmpd="sng" algn="ctr">
+                  <a:tcPr anchor="ctr" marB="50800" marT="50800" marR="0" marL="0">
+                    <a:lnL algn="ctr" cmpd="sng" cap="flat" w="0">
                       <a:noFill/>
                       <a:prstDash val="solid"/>
                     </a:lnL>
-                    <a:lnR w="0" cap="flat" cmpd="sng" algn="ctr">
+                    <a:lnR algn="ctr" cmpd="sng" cap="flat" w="0">
                       <a:noFill/>
                       <a:prstDash val="solid"/>
                     </a:lnR>
-                    <a:lnT w="0" cap="flat" cmpd="sng" algn="ctr">
+                    <a:lnT algn="ctr" cmpd="sng" cap="flat" w="0">
                       <a:noFill/>
                       <a:prstDash val="solid"/>
                     </a:lnT>
-                    <a:lnB w="0" cap="flat" cmpd="sng" algn="ctr">
+                    <a:lnB algn="ctr" cmpd="sng" cap="flat" w="0">
                       <a:noFill/>
                       <a:prstDash val="solid"/>
                     </a:lnB>
@@ -3698,11 +3532,6 @@
                     </a:solidFill>
                   </a:tcPr>
                 </a:tc>
-                <a:extLst>
-                  <a:ext uri="{0D108BD9-81ED-4DB2-BD59-A6C34878D82A}">
-                    <a16:rowId xmlns:a16="http://schemas.microsoft.com/office/drawing/2014/main" val="10002"/>
-                  </a:ext>
-                </a:extLst>
               </a:tr>
               <a:tr h="375437">
                 <a:tc>
@@ -3710,7 +3539,7 @@
                     <a:bodyPr/>
                     <a:lstStyle/>
                     <a:p>
-                      <a:pPr marL="50800" marR="50800" algn="l">
+                      <a:pPr algn="l" marL="50800" marR="50800">
                         <a:lnSpc>
                           <a:spcPct val="100000"/>
                         </a:lnSpc>
@@ -3723,7 +3552,7 @@
                         <a:buNone/>
                       </a:pPr>
                       <a:r>
-                        <a:rPr sz="1600" b="0" i="0" u="none" strike="noStrike" cap="none">
+                        <a:rPr cap="none" sz="1600" i="0" b="0" u="none" strike="noStrike">
                           <a:solidFill>
                             <a:srgbClr val="000000">
                               <a:alpha val="100000"/>
@@ -3731,26 +3560,27 @@
                           </a:solidFill>
                           <a:latin typeface="Arial"/>
                           <a:cs typeface="Arial"/>
+                          <a:ea typeface="Arial"/>
                           <a:sym typeface="Arial"/>
                         </a:rPr>
                         <a:t>non</a:t>
                       </a:r>
                     </a:p>
                   </a:txBody>
-                  <a:tcPr marL="0" marR="0" marT="50800" marB="50800" anchor="ctr">
-                    <a:lnL w="0" cap="flat" cmpd="sng" algn="ctr">
+                  <a:tcPr anchor="ctr" marB="50800" marT="50800" marR="0" marL="0">
+                    <a:lnL algn="ctr" cmpd="sng" cap="flat" w="0">
                       <a:noFill/>
                       <a:prstDash val="solid"/>
                     </a:lnL>
-                    <a:lnR w="0" cap="flat" cmpd="sng" algn="ctr">
+                    <a:lnR algn="ctr" cmpd="sng" cap="flat" w="0">
                       <a:noFill/>
                       <a:prstDash val="solid"/>
                     </a:lnR>
-                    <a:lnT w="0" cap="flat" cmpd="sng" algn="ctr">
+                    <a:lnT algn="ctr" cmpd="sng" cap="flat" w="0">
                       <a:noFill/>
                       <a:prstDash val="solid"/>
                     </a:lnT>
-                    <a:lnB w="19050" cap="flat" cmpd="sng" algn="ctr">
+                    <a:lnB algn="ctr" cmpd="sng" cap="flat" w="19050">
                       <a:solidFill>
                         <a:srgbClr val="666666">
                           <a:alpha val="100000"/>
@@ -3770,7 +3600,7 @@
                     <a:bodyPr/>
                     <a:lstStyle/>
                     <a:p>
-                      <a:pPr marL="50800" marR="50800" algn="ctr">
+                      <a:pPr algn="ctr" marL="50800" marR="50800">
                         <a:lnSpc>
                           <a:spcPct val="100000"/>
                         </a:lnSpc>
@@ -3783,7 +3613,7 @@
                         <a:buNone/>
                       </a:pPr>
                       <a:r>
-                        <a:rPr sz="1600" b="0" i="0" u="none" strike="noStrike" cap="none" dirty="0">
+                        <a:rPr cap="none" sz="1600" i="0" b="0" u="none" strike="noStrike">
                           <a:solidFill>
                             <a:srgbClr val="000000">
                               <a:alpha val="100000"/>
@@ -3791,26 +3621,27 @@
                           </a:solidFill>
                           <a:latin typeface="Arial"/>
                           <a:cs typeface="Arial"/>
+                          <a:ea typeface="Arial"/>
                           <a:sym typeface="Arial"/>
                         </a:rPr>
                         <a:t>18</a:t>
                       </a:r>
                     </a:p>
                   </a:txBody>
-                  <a:tcPr marL="0" marR="0" marT="50800" marB="50800" anchor="ctr">
-                    <a:lnL w="0" cap="flat" cmpd="sng" algn="ctr">
+                  <a:tcPr anchor="ctr" marB="50800" marT="50800" marR="0" marL="0">
+                    <a:lnL algn="ctr" cmpd="sng" cap="flat" w="0">
                       <a:noFill/>
                       <a:prstDash val="solid"/>
                     </a:lnL>
-                    <a:lnR w="0" cap="flat" cmpd="sng" algn="ctr">
+                    <a:lnR algn="ctr" cmpd="sng" cap="flat" w="0">
                       <a:noFill/>
                       <a:prstDash val="solid"/>
                     </a:lnR>
-                    <a:lnT w="0" cap="flat" cmpd="sng" algn="ctr">
+                    <a:lnT algn="ctr" cmpd="sng" cap="flat" w="0">
                       <a:noFill/>
                       <a:prstDash val="solid"/>
                     </a:lnT>
-                    <a:lnB w="19050" cap="flat" cmpd="sng" algn="ctr">
+                    <a:lnB algn="ctr" cmpd="sng" cap="flat" w="19050">
                       <a:solidFill>
                         <a:srgbClr val="666666">
                           <a:alpha val="100000"/>
@@ -3825,11 +3656,6 @@
                     </a:solidFill>
                   </a:tcPr>
                 </a:tc>
-                <a:extLst>
-                  <a:ext uri="{0D108BD9-81ED-4DB2-BD59-A6C34878D82A}">
-                    <a16:rowId xmlns:a16="http://schemas.microsoft.com/office/drawing/2014/main" val="10003"/>
-                  </a:ext>
-                </a:extLst>
               </a:tr>
             </a:tbl>
           </a:graphicData>
@@ -3837,49 +3663,31 @@
       </p:graphicFrame>
       <p:graphicFrame>
         <p:nvGraphicFramePr>
-          <p:cNvPr id="6" name="Tableau 5"/>
+          <p:cNvPr id="6" name=""/>
           <p:cNvGraphicFramePr>
-            <a:graphicFrameLocks noGrp="1"/>
+            <a:graphicFrameLocks noGrp="true"/>
           </p:cNvGraphicFramePr>
-          <p:nvPr>
-            <p:extLst>
-              <p:ext uri="{D42A27DB-BD31-4B8C-83A1-F6EECF244321}">
-                <p14:modId xmlns:p14="http://schemas.microsoft.com/office/powerpoint/2010/main" val="1048143255"/>
-              </p:ext>
-            </p:extLst>
-          </p:nvPr>
+          <p:nvPr/>
         </p:nvGraphicFramePr>
-        <p:xfrm>
-          <a:off x="5004048" y="1139818"/>
-          <a:ext cx="2520280" cy="4981246"/>
+        <p:xfrm rot="0">
+          <a:off x="4754880" y="3840480"/>
+          <a:ext cx="3840480" cy="3474720"/>
         </p:xfrm>
         <a:graphic>
           <a:graphicData uri="http://schemas.openxmlformats.org/drawingml/2006/table">
             <a:tbl>
               <a:tblPr/>
               <a:tblGrid>
-                <a:gridCol w="1835181">
-                  <a:extLst>
-                    <a:ext uri="{9D8B030D-6E8A-4147-A177-3AD203B41FA5}">
-                      <a16:colId xmlns:a16="http://schemas.microsoft.com/office/drawing/2014/main" val="20000"/>
-                    </a:ext>
-                  </a:extLst>
-                </a:gridCol>
-                <a:gridCol w="685099">
-                  <a:extLst>
-                    <a:ext uri="{9D8B030D-6E8A-4147-A177-3AD203B41FA5}">
-                      <a16:colId xmlns:a16="http://schemas.microsoft.com/office/drawing/2014/main" val="20001"/>
-                    </a:ext>
-                  </a:extLst>
-                </a:gridCol>
+                <a:gridCol w="1333394"/>
+                <a:gridCol w="497774"/>
               </a:tblGrid>
-              <a:tr h="441629">
+              <a:tr h="377322">
                 <a:tc>
                   <a:txBody>
                     <a:bodyPr/>
                     <a:lstStyle/>
                     <a:p>
-                      <a:pPr marL="50800" marR="50800" algn="l">
+                      <a:pPr algn="l" marL="50800" marR="50800">
                         <a:lnSpc>
                           <a:spcPct val="100000"/>
                         </a:lnSpc>
@@ -3892,7 +3700,7 @@
                         <a:buNone/>
                       </a:pPr>
                       <a:r>
-                        <a:rPr sz="1600" b="1" i="0" u="none" strike="noStrike" cap="none" dirty="0">
+                        <a:rPr cap="none" sz="1600" i="0" b="1" u="none" strike="noStrike">
                           <a:solidFill>
                             <a:srgbClr val="000000">
                               <a:alpha val="100000"/>
@@ -3900,22 +3708,23 @@
                           </a:solidFill>
                           <a:latin typeface="Arial"/>
                           <a:cs typeface="Arial"/>
+                          <a:ea typeface="Arial"/>
                           <a:sym typeface="Arial"/>
                         </a:rPr>
                         <a:t>Communes</a:t>
                       </a:r>
                     </a:p>
                   </a:txBody>
-                  <a:tcPr marL="0" marR="0" marT="50800" marB="50800" anchor="ctr">
-                    <a:lnL w="0" cap="flat" cmpd="sng" algn="ctr">
+                  <a:tcPr anchor="ctr" marB="50800" marT="50800" marR="0" marL="0">
+                    <a:lnL algn="ctr" cmpd="sng" cap="flat" w="0">
                       <a:noFill/>
                       <a:prstDash val="solid"/>
                     </a:lnL>
-                    <a:lnR w="0" cap="flat" cmpd="sng" algn="ctr">
+                    <a:lnR algn="ctr" cmpd="sng" cap="flat" w="0">
                       <a:noFill/>
                       <a:prstDash val="solid"/>
                     </a:lnR>
-                    <a:lnT w="19050" cap="flat" cmpd="sng" algn="ctr">
+                    <a:lnT algn="ctr" cmpd="sng" cap="flat" w="19050">
                       <a:solidFill>
                         <a:srgbClr val="666666">
                           <a:alpha val="100000"/>
@@ -3923,7 +3732,7 @@
                       </a:solidFill>
                       <a:prstDash val="solid"/>
                     </a:lnT>
-                    <a:lnB w="19050" cap="flat" cmpd="sng" algn="ctr">
+                    <a:lnB algn="ctr" cmpd="sng" cap="flat" w="19050">
                       <a:solidFill>
                         <a:srgbClr val="666666">
                           <a:alpha val="100000"/>
@@ -3943,7 +3752,7 @@
                     <a:bodyPr/>
                     <a:lstStyle/>
                     <a:p>
-                      <a:pPr marL="50800" marR="50800" algn="ctr">
+                      <a:pPr algn="ctr" marL="50800" marR="50800">
                         <a:lnSpc>
                           <a:spcPct val="100000"/>
                         </a:lnSpc>
@@ -3956,7 +3765,7 @@
                         <a:buNone/>
                       </a:pPr>
                       <a:r>
-                        <a:rPr sz="1600" b="1" i="0" u="none" strike="noStrike" cap="none">
+                        <a:rPr cap="none" sz="1600" i="0" b="1" u="none" strike="noStrike">
                           <a:solidFill>
                             <a:srgbClr val="000000">
                               <a:alpha val="100000"/>
@@ -3964,22 +3773,23 @@
                           </a:solidFill>
                           <a:latin typeface="Arial"/>
                           <a:cs typeface="Arial"/>
+                          <a:ea typeface="Arial"/>
                           <a:sym typeface="Arial"/>
                         </a:rPr>
                         <a:t>Nb</a:t>
                       </a:r>
                     </a:p>
                   </a:txBody>
-                  <a:tcPr marL="0" marR="0" marT="50800" marB="50800" anchor="ctr">
-                    <a:lnL w="0" cap="flat" cmpd="sng" algn="ctr">
+                  <a:tcPr anchor="ctr" marB="50800" marT="50800" marR="0" marL="0">
+                    <a:lnL algn="ctr" cmpd="sng" cap="flat" w="0">
                       <a:noFill/>
                       <a:prstDash val="solid"/>
                     </a:lnL>
-                    <a:lnR w="0" cap="flat" cmpd="sng" algn="ctr">
+                    <a:lnR algn="ctr" cmpd="sng" cap="flat" w="0">
                       <a:noFill/>
                       <a:prstDash val="solid"/>
                     </a:lnR>
-                    <a:lnT w="19050" cap="flat" cmpd="sng" algn="ctr">
+                    <a:lnT algn="ctr" cmpd="sng" cap="flat" w="19050">
                       <a:solidFill>
                         <a:srgbClr val="666666">
                           <a:alpha val="100000"/>
@@ -3987,7 +3797,7 @@
                       </a:solidFill>
                       <a:prstDash val="solid"/>
                     </a:lnT>
-                    <a:lnB w="19050" cap="flat" cmpd="sng" algn="ctr">
+                    <a:lnB algn="ctr" cmpd="sng" cap="flat" w="19050">
                       <a:solidFill>
                         <a:srgbClr val="666666">
                           <a:alpha val="100000"/>
@@ -4002,19 +3812,14 @@
                     </a:solidFill>
                   </a:tcPr>
                 </a:tc>
-                <a:extLst>
-                  <a:ext uri="{0D108BD9-81ED-4DB2-BD59-A6C34878D82A}">
-                    <a16:rowId xmlns:a16="http://schemas.microsoft.com/office/drawing/2014/main" val="10000"/>
-                  </a:ext>
-                </a:extLst>
               </a:tr>
-              <a:tr h="441629">
+              <a:tr h="377322">
                 <a:tc>
                   <a:txBody>
                     <a:bodyPr/>
                     <a:lstStyle/>
                     <a:p>
-                      <a:pPr marL="50800" marR="50800" algn="l">
+                      <a:pPr algn="l" marL="50800" marR="50800">
                         <a:lnSpc>
                           <a:spcPct val="100000"/>
                         </a:lnSpc>
@@ -4027,7 +3832,7 @@
                         <a:buNone/>
                       </a:pPr>
                       <a:r>
-                        <a:rPr sz="1600" b="0" i="0" u="none" strike="noStrike" cap="none">
+                        <a:rPr cap="none" sz="1600" i="0" b="0" u="none" strike="noStrike">
                           <a:solidFill>
                             <a:srgbClr val="000000">
                               <a:alpha val="100000"/>
@@ -4035,31 +3840,27 @@
                           </a:solidFill>
                           <a:latin typeface="Arial"/>
                           <a:cs typeface="Arial"/>
+                          <a:ea typeface="Arial"/>
                           <a:sym typeface="Arial"/>
                         </a:rPr>
                         <a:t>SLM</a:t>
                       </a:r>
                     </a:p>
                   </a:txBody>
-                  <a:tcPr marL="0" marR="0" marT="50800" marB="50800" anchor="ctr">
-                    <a:lnL w="0" cap="flat" cmpd="sng" algn="ctr">
+                  <a:tcPr anchor="ctr" marB="50800" marT="50800" marR="0" marL="0">
+                    <a:lnL algn="ctr" cmpd="sng" cap="flat" w="0">
                       <a:noFill/>
                       <a:prstDash val="solid"/>
                     </a:lnL>
-                    <a:lnR w="0" cap="flat" cmpd="sng" algn="ctr">
+                    <a:lnR algn="ctr" cmpd="sng" cap="flat" w="0">
                       <a:noFill/>
                       <a:prstDash val="solid"/>
                     </a:lnR>
-                    <a:lnT w="19050" cap="flat" cmpd="sng" algn="ctr">
-                      <a:solidFill>
-                        <a:srgbClr val="666666"/>
-                      </a:solidFill>
-                      <a:prstDash val="solid"/>
-                      <a:round/>
-                      <a:headEnd type="none" w="med" len="med"/>
-                      <a:tailEnd type="none" w="med" len="med"/>
+                    <a:lnT algn="ctr" cmpd="sng" cap="flat" w="0">
+                      <a:noFill/>
+                      <a:prstDash val="solid"/>
                     </a:lnT>
-                    <a:lnB w="0" cap="flat" cmpd="sng" algn="ctr">
+                    <a:lnB algn="ctr" cmpd="sng" cap="flat" w="0">
                       <a:noFill/>
                       <a:prstDash val="solid"/>
                     </a:lnB>
@@ -4075,7 +3876,7 @@
                     <a:bodyPr/>
                     <a:lstStyle/>
                     <a:p>
-                      <a:pPr marL="50800" marR="50800" algn="ctr">
+                      <a:pPr algn="ctr" marL="50800" marR="50800">
                         <a:lnSpc>
                           <a:spcPct val="100000"/>
                         </a:lnSpc>
@@ -4088,7 +3889,7 @@
                         <a:buNone/>
                       </a:pPr>
                       <a:r>
-                        <a:rPr sz="1600" b="0" i="0" u="none" strike="noStrike" cap="none">
+                        <a:rPr cap="none" sz="1600" i="0" b="0" u="none" strike="noStrike">
                           <a:solidFill>
                             <a:srgbClr val="000000">
                               <a:alpha val="100000"/>
@@ -4096,31 +3897,27 @@
                           </a:solidFill>
                           <a:latin typeface="Arial"/>
                           <a:cs typeface="Arial"/>
+                          <a:ea typeface="Arial"/>
                           <a:sym typeface="Arial"/>
                         </a:rPr>
                         <a:t>27</a:t>
                       </a:r>
                     </a:p>
                   </a:txBody>
-                  <a:tcPr marL="0" marR="0" marT="50800" marB="50800" anchor="ctr">
-                    <a:lnL w="0" cap="flat" cmpd="sng" algn="ctr">
+                  <a:tcPr anchor="ctr" marB="50800" marT="50800" marR="0" marL="0">
+                    <a:lnL algn="ctr" cmpd="sng" cap="flat" w="0">
                       <a:noFill/>
                       <a:prstDash val="solid"/>
                     </a:lnL>
-                    <a:lnR w="0" cap="flat" cmpd="sng" algn="ctr">
+                    <a:lnR algn="ctr" cmpd="sng" cap="flat" w="0">
                       <a:noFill/>
                       <a:prstDash val="solid"/>
                     </a:lnR>
-                    <a:lnT w="19050" cap="flat" cmpd="sng" algn="ctr">
-                      <a:solidFill>
-                        <a:srgbClr val="666666"/>
-                      </a:solidFill>
-                      <a:prstDash val="solid"/>
-                      <a:round/>
-                      <a:headEnd type="none" w="med" len="med"/>
-                      <a:tailEnd type="none" w="med" len="med"/>
+                    <a:lnT algn="ctr" cmpd="sng" cap="flat" w="0">
+                      <a:noFill/>
+                      <a:prstDash val="solid"/>
                     </a:lnT>
-                    <a:lnB w="0" cap="flat" cmpd="sng" algn="ctr">
+                    <a:lnB algn="ctr" cmpd="sng" cap="flat" w="0">
                       <a:noFill/>
                       <a:prstDash val="solid"/>
                     </a:lnB>
@@ -4131,19 +3928,14 @@
                     </a:solidFill>
                   </a:tcPr>
                 </a:tc>
-                <a:extLst>
-                  <a:ext uri="{0D108BD9-81ED-4DB2-BD59-A6C34878D82A}">
-                    <a16:rowId xmlns:a16="http://schemas.microsoft.com/office/drawing/2014/main" val="10001"/>
-                  </a:ext>
-                </a:extLst>
               </a:tr>
-              <a:tr h="439538">
+              <a:tr h="375536">
                 <a:tc>
                   <a:txBody>
                     <a:bodyPr/>
                     <a:lstStyle/>
                     <a:p>
-                      <a:pPr marL="50800" marR="50800" algn="l">
+                      <a:pPr algn="l" marL="50800" marR="50800">
                         <a:lnSpc>
                           <a:spcPct val="100000"/>
                         </a:lnSpc>
@@ -4156,7 +3948,7 @@
                         <a:buNone/>
                       </a:pPr>
                       <a:r>
-                        <a:rPr sz="1600" b="0" i="0" u="none" strike="noStrike" cap="none">
+                        <a:rPr cap="none" sz="1600" i="0" b="0" u="none" strike="noStrike">
                           <a:solidFill>
                             <a:srgbClr val="000000">
                               <a:alpha val="100000"/>
@@ -4164,26 +3956,27 @@
                           </a:solidFill>
                           <a:latin typeface="Arial"/>
                           <a:cs typeface="Arial"/>
+                          <a:ea typeface="Arial"/>
                           <a:sym typeface="Arial"/>
                         </a:rPr>
                         <a:t>Iracoubo</a:t>
                       </a:r>
                     </a:p>
                   </a:txBody>
-                  <a:tcPr marL="0" marR="0" marT="50800" marB="50800" anchor="ctr">
-                    <a:lnL w="0" cap="flat" cmpd="sng" algn="ctr">
+                  <a:tcPr anchor="ctr" marB="50800" marT="50800" marR="0" marL="0">
+                    <a:lnL algn="ctr" cmpd="sng" cap="flat" w="0">
                       <a:noFill/>
                       <a:prstDash val="solid"/>
                     </a:lnL>
-                    <a:lnR w="0" cap="flat" cmpd="sng" algn="ctr">
+                    <a:lnR algn="ctr" cmpd="sng" cap="flat" w="0">
                       <a:noFill/>
                       <a:prstDash val="solid"/>
                     </a:lnR>
-                    <a:lnT w="0" cap="flat" cmpd="sng" algn="ctr">
+                    <a:lnT algn="ctr" cmpd="sng" cap="flat" w="0">
                       <a:noFill/>
                       <a:prstDash val="solid"/>
                     </a:lnT>
-                    <a:lnB w="0" cap="flat" cmpd="sng" algn="ctr">
+                    <a:lnB algn="ctr" cmpd="sng" cap="flat" w="0">
                       <a:noFill/>
                       <a:prstDash val="solid"/>
                     </a:lnB>
@@ -4199,7 +3992,7 @@
                     <a:bodyPr/>
                     <a:lstStyle/>
                     <a:p>
-                      <a:pPr marL="50800" marR="50800" algn="ctr">
+                      <a:pPr algn="ctr" marL="50800" marR="50800">
                         <a:lnSpc>
                           <a:spcPct val="100000"/>
                         </a:lnSpc>
@@ -4212,7 +4005,7 @@
                         <a:buNone/>
                       </a:pPr>
                       <a:r>
-                        <a:rPr sz="1600" b="0" i="0" u="none" strike="noStrike" cap="none">
+                        <a:rPr cap="none" sz="1600" i="0" b="0" u="none" strike="noStrike">
                           <a:solidFill>
                             <a:srgbClr val="000000">
                               <a:alpha val="100000"/>
@@ -4220,26 +4013,27 @@
                           </a:solidFill>
                           <a:latin typeface="Arial"/>
                           <a:cs typeface="Arial"/>
+                          <a:ea typeface="Arial"/>
                           <a:sym typeface="Arial"/>
                         </a:rPr>
                         <a:t>13</a:t>
                       </a:r>
                     </a:p>
                   </a:txBody>
-                  <a:tcPr marL="0" marR="0" marT="50800" marB="50800" anchor="ctr">
-                    <a:lnL w="0" cap="flat" cmpd="sng" algn="ctr">
+                  <a:tcPr anchor="ctr" marB="50800" marT="50800" marR="0" marL="0">
+                    <a:lnL algn="ctr" cmpd="sng" cap="flat" w="0">
                       <a:noFill/>
                       <a:prstDash val="solid"/>
                     </a:lnL>
-                    <a:lnR w="0" cap="flat" cmpd="sng" algn="ctr">
+                    <a:lnR algn="ctr" cmpd="sng" cap="flat" w="0">
                       <a:noFill/>
                       <a:prstDash val="solid"/>
                     </a:lnR>
-                    <a:lnT w="0" cap="flat" cmpd="sng" algn="ctr">
+                    <a:lnT algn="ctr" cmpd="sng" cap="flat" w="0">
                       <a:noFill/>
                       <a:prstDash val="solid"/>
                     </a:lnT>
-                    <a:lnB w="0" cap="flat" cmpd="sng" algn="ctr">
+                    <a:lnB algn="ctr" cmpd="sng" cap="flat" w="0">
                       <a:noFill/>
                       <a:prstDash val="solid"/>
                     </a:lnB>
@@ -4250,19 +4044,14 @@
                     </a:solidFill>
                   </a:tcPr>
                 </a:tc>
-                <a:extLst>
-                  <a:ext uri="{0D108BD9-81ED-4DB2-BD59-A6C34878D82A}">
-                    <a16:rowId xmlns:a16="http://schemas.microsoft.com/office/drawing/2014/main" val="10002"/>
-                  </a:ext>
-                </a:extLst>
               </a:tr>
-              <a:tr h="438610">
+              <a:tr h="374743">
                 <a:tc>
                   <a:txBody>
                     <a:bodyPr/>
                     <a:lstStyle/>
                     <a:p>
-                      <a:pPr marL="50800" marR="50800" algn="l">
+                      <a:pPr algn="l" marL="50800" marR="50800">
                         <a:lnSpc>
                           <a:spcPct val="100000"/>
                         </a:lnSpc>
@@ -4275,7 +4064,7 @@
                         <a:buNone/>
                       </a:pPr>
                       <a:r>
-                        <a:rPr sz="1600" b="0" i="0" u="none" strike="noStrike" cap="none" dirty="0">
+                        <a:rPr cap="none" sz="1600" i="0" b="0" u="none" strike="noStrike">
                           <a:solidFill>
                             <a:srgbClr val="000000">
                               <a:alpha val="100000"/>
@@ -4283,26 +4072,27 @@
                           </a:solidFill>
                           <a:latin typeface="Arial"/>
                           <a:cs typeface="Arial"/>
+                          <a:ea typeface="Arial"/>
                           <a:sym typeface="Arial"/>
                         </a:rPr>
                         <a:t>Mana</a:t>
                       </a:r>
                     </a:p>
                   </a:txBody>
-                  <a:tcPr marL="0" marR="0" marT="50800" marB="50800" anchor="ctr">
-                    <a:lnL w="0" cap="flat" cmpd="sng" algn="ctr">
+                  <a:tcPr anchor="ctr" marB="50800" marT="50800" marR="0" marL="0">
+                    <a:lnL algn="ctr" cmpd="sng" cap="flat" w="0">
                       <a:noFill/>
                       <a:prstDash val="solid"/>
                     </a:lnL>
-                    <a:lnR w="0" cap="flat" cmpd="sng" algn="ctr">
+                    <a:lnR algn="ctr" cmpd="sng" cap="flat" w="0">
                       <a:noFill/>
                       <a:prstDash val="solid"/>
                     </a:lnR>
-                    <a:lnT w="0" cap="flat" cmpd="sng" algn="ctr">
+                    <a:lnT algn="ctr" cmpd="sng" cap="flat" w="0">
                       <a:noFill/>
                       <a:prstDash val="solid"/>
                     </a:lnT>
-                    <a:lnB w="0" cap="flat" cmpd="sng" algn="ctr">
+                    <a:lnB algn="ctr" cmpd="sng" cap="flat" w="0">
                       <a:noFill/>
                       <a:prstDash val="solid"/>
                     </a:lnB>
@@ -4318,7 +4108,7 @@
                     <a:bodyPr/>
                     <a:lstStyle/>
                     <a:p>
-                      <a:pPr marL="50800" marR="50800" algn="ctr">
+                      <a:pPr algn="ctr" marL="50800" marR="50800">
                         <a:lnSpc>
                           <a:spcPct val="100000"/>
                         </a:lnSpc>
@@ -4331,7 +4121,7 @@
                         <a:buNone/>
                       </a:pPr>
                       <a:r>
-                        <a:rPr sz="1600" b="0" i="0" u="none" strike="noStrike" cap="none">
+                        <a:rPr cap="none" sz="1600" i="0" b="0" u="none" strike="noStrike">
                           <a:solidFill>
                             <a:srgbClr val="000000">
                               <a:alpha val="100000"/>
@@ -4339,26 +4129,27 @@
                           </a:solidFill>
                           <a:latin typeface="Arial"/>
                           <a:cs typeface="Arial"/>
+                          <a:ea typeface="Arial"/>
                           <a:sym typeface="Arial"/>
                         </a:rPr>
                         <a:t>11</a:t>
                       </a:r>
                     </a:p>
                   </a:txBody>
-                  <a:tcPr marL="0" marR="0" marT="50800" marB="50800" anchor="ctr">
-                    <a:lnL w="0" cap="flat" cmpd="sng" algn="ctr">
+                  <a:tcPr anchor="ctr" marB="50800" marT="50800" marR="0" marL="0">
+                    <a:lnL algn="ctr" cmpd="sng" cap="flat" w="0">
                       <a:noFill/>
                       <a:prstDash val="solid"/>
                     </a:lnL>
-                    <a:lnR w="0" cap="flat" cmpd="sng" algn="ctr">
+                    <a:lnR algn="ctr" cmpd="sng" cap="flat" w="0">
                       <a:noFill/>
                       <a:prstDash val="solid"/>
                     </a:lnR>
-                    <a:lnT w="0" cap="flat" cmpd="sng" algn="ctr">
+                    <a:lnT algn="ctr" cmpd="sng" cap="flat" w="0">
                       <a:noFill/>
                       <a:prstDash val="solid"/>
                     </a:lnT>
-                    <a:lnB w="0" cap="flat" cmpd="sng" algn="ctr">
+                    <a:lnB algn="ctr" cmpd="sng" cap="flat" w="0">
                       <a:noFill/>
                       <a:prstDash val="solid"/>
                     </a:lnB>
@@ -4369,19 +4160,14 @@
                     </a:solidFill>
                   </a:tcPr>
                 </a:tc>
-                <a:extLst>
-                  <a:ext uri="{0D108BD9-81ED-4DB2-BD59-A6C34878D82A}">
-                    <a16:rowId xmlns:a16="http://schemas.microsoft.com/office/drawing/2014/main" val="10003"/>
-                  </a:ext>
-                </a:extLst>
               </a:tr>
-              <a:tr h="441745">
+              <a:tr h="377422">
                 <a:tc>
                   <a:txBody>
                     <a:bodyPr/>
                     <a:lstStyle/>
                     <a:p>
-                      <a:pPr marL="50800" marR="50800" algn="l">
+                      <a:pPr algn="l" marL="50800" marR="50800">
                         <a:lnSpc>
                           <a:spcPct val="100000"/>
                         </a:lnSpc>
@@ -4394,7 +4180,7 @@
                         <a:buNone/>
                       </a:pPr>
                       <a:r>
-                        <a:rPr sz="1600" b="0" i="0" u="none" strike="noStrike" cap="none" dirty="0">
+                        <a:rPr cap="none" sz="1600" i="0" b="0" u="none" strike="noStrike">
                           <a:solidFill>
                             <a:srgbClr val="000000">
                               <a:alpha val="100000"/>
@@ -4402,26 +4188,27 @@
                           </a:solidFill>
                           <a:latin typeface="Arial"/>
                           <a:cs typeface="Arial"/>
+                          <a:ea typeface="Arial"/>
                           <a:sym typeface="Arial"/>
                         </a:rPr>
                         <a:t>SGO</a:t>
                       </a:r>
                     </a:p>
                   </a:txBody>
-                  <a:tcPr marL="0" marR="0" marT="50800" marB="50800" anchor="ctr">
-                    <a:lnL w="0" cap="flat" cmpd="sng" algn="ctr">
+                  <a:tcPr anchor="ctr" marB="50800" marT="50800" marR="0" marL="0">
+                    <a:lnL algn="ctr" cmpd="sng" cap="flat" w="0">
                       <a:noFill/>
                       <a:prstDash val="solid"/>
                     </a:lnL>
-                    <a:lnR w="0" cap="flat" cmpd="sng" algn="ctr">
+                    <a:lnR algn="ctr" cmpd="sng" cap="flat" w="0">
                       <a:noFill/>
                       <a:prstDash val="solid"/>
                     </a:lnR>
-                    <a:lnT w="0" cap="flat" cmpd="sng" algn="ctr">
+                    <a:lnT algn="ctr" cmpd="sng" cap="flat" w="0">
                       <a:noFill/>
                       <a:prstDash val="solid"/>
                     </a:lnT>
-                    <a:lnB w="0" cap="flat" cmpd="sng" algn="ctr">
+                    <a:lnB algn="ctr" cmpd="sng" cap="flat" w="0">
                       <a:noFill/>
                       <a:prstDash val="solid"/>
                     </a:lnB>
@@ -4437,7 +4224,7 @@
                     <a:bodyPr/>
                     <a:lstStyle/>
                     <a:p>
-                      <a:pPr marL="50800" marR="50800" algn="ctr">
+                      <a:pPr algn="ctr" marL="50800" marR="50800">
                         <a:lnSpc>
                           <a:spcPct val="100000"/>
                         </a:lnSpc>
@@ -4450,7 +4237,7 @@
                         <a:buNone/>
                       </a:pPr>
                       <a:r>
-                        <a:rPr sz="1600" b="0" i="0" u="none" strike="noStrike" cap="none">
+                        <a:rPr cap="none" sz="1600" i="0" b="0" u="none" strike="noStrike">
                           <a:solidFill>
                             <a:srgbClr val="000000">
                               <a:alpha val="100000"/>
@@ -4458,26 +4245,27 @@
                           </a:solidFill>
                           <a:latin typeface="Arial"/>
                           <a:cs typeface="Arial"/>
+                          <a:ea typeface="Arial"/>
                           <a:sym typeface="Arial"/>
                         </a:rPr>
                         <a:t>8</a:t>
                       </a:r>
                     </a:p>
                   </a:txBody>
-                  <a:tcPr marL="0" marR="0" marT="50800" marB="50800" anchor="ctr">
-                    <a:lnL w="0" cap="flat" cmpd="sng" algn="ctr">
+                  <a:tcPr anchor="ctr" marB="50800" marT="50800" marR="0" marL="0">
+                    <a:lnL algn="ctr" cmpd="sng" cap="flat" w="0">
                       <a:noFill/>
                       <a:prstDash val="solid"/>
                     </a:lnL>
-                    <a:lnR w="0" cap="flat" cmpd="sng" algn="ctr">
+                    <a:lnR algn="ctr" cmpd="sng" cap="flat" w="0">
                       <a:noFill/>
                       <a:prstDash val="solid"/>
                     </a:lnR>
-                    <a:lnT w="0" cap="flat" cmpd="sng" algn="ctr">
+                    <a:lnT algn="ctr" cmpd="sng" cap="flat" w="0">
                       <a:noFill/>
                       <a:prstDash val="solid"/>
                     </a:lnT>
-                    <a:lnB w="0" cap="flat" cmpd="sng" algn="ctr">
+                    <a:lnB algn="ctr" cmpd="sng" cap="flat" w="0">
                       <a:noFill/>
                       <a:prstDash val="solid"/>
                     </a:lnB>
@@ -4488,19 +4276,14 @@
                     </a:solidFill>
                   </a:tcPr>
                 </a:tc>
-                <a:extLst>
-                  <a:ext uri="{0D108BD9-81ED-4DB2-BD59-A6C34878D82A}">
-                    <a16:rowId xmlns:a16="http://schemas.microsoft.com/office/drawing/2014/main" val="10004"/>
-                  </a:ext>
-                </a:extLst>
               </a:tr>
-              <a:tr h="439422">
+              <a:tr h="375437">
                 <a:tc>
                   <a:txBody>
                     <a:bodyPr/>
                     <a:lstStyle/>
                     <a:p>
-                      <a:pPr marL="50800" marR="50800" algn="l">
+                      <a:pPr algn="l" marL="50800" marR="50800">
                         <a:lnSpc>
                           <a:spcPct val="100000"/>
                         </a:lnSpc>
@@ -4513,7 +4296,7 @@
                         <a:buNone/>
                       </a:pPr>
                       <a:r>
-                        <a:rPr sz="1600" b="0" i="0" u="none" strike="noStrike" cap="none" dirty="0" err="1">
+                        <a:rPr cap="none" sz="1600" i="0" b="0" u="none" strike="noStrike">
                           <a:solidFill>
                             <a:srgbClr val="000000">
                               <a:alpha val="100000"/>
@@ -4521,36 +4304,27 @@
                           </a:solidFill>
                           <a:latin typeface="Arial"/>
                           <a:cs typeface="Arial"/>
+                          <a:ea typeface="Arial"/>
                           <a:sym typeface="Arial"/>
                         </a:rPr>
                         <a:t>Macouria</a:t>
                       </a:r>
-                      <a:endParaRPr sz="1600" b="0" i="0" u="none" strike="noStrike" cap="none" dirty="0">
-                        <a:solidFill>
-                          <a:srgbClr val="000000">
-                            <a:alpha val="100000"/>
-                          </a:srgbClr>
-                        </a:solidFill>
-                        <a:latin typeface="Arial"/>
-                        <a:cs typeface="Arial"/>
-                        <a:sym typeface="Arial"/>
-                      </a:endParaRPr>
                     </a:p>
                   </a:txBody>
-                  <a:tcPr marL="0" marR="0" marT="50800" marB="50800" anchor="ctr">
-                    <a:lnL w="0" cap="flat" cmpd="sng" algn="ctr">
+                  <a:tcPr anchor="ctr" marB="50800" marT="50800" marR="0" marL="0">
+                    <a:lnL algn="ctr" cmpd="sng" cap="flat" w="0">
                       <a:noFill/>
                       <a:prstDash val="solid"/>
                     </a:lnL>
-                    <a:lnR w="0" cap="flat" cmpd="sng" algn="ctr">
+                    <a:lnR algn="ctr" cmpd="sng" cap="flat" w="0">
                       <a:noFill/>
                       <a:prstDash val="solid"/>
                     </a:lnR>
-                    <a:lnT w="0" cap="flat" cmpd="sng" algn="ctr">
+                    <a:lnT algn="ctr" cmpd="sng" cap="flat" w="0">
                       <a:noFill/>
                       <a:prstDash val="solid"/>
                     </a:lnT>
-                    <a:lnB w="0" cap="flat" cmpd="sng" algn="ctr">
+                    <a:lnB algn="ctr" cmpd="sng" cap="flat" w="0">
                       <a:noFill/>
                       <a:prstDash val="solid"/>
                     </a:lnB>
@@ -4566,7 +4340,7 @@
                     <a:bodyPr/>
                     <a:lstStyle/>
                     <a:p>
-                      <a:pPr marL="50800" marR="50800" algn="ctr">
+                      <a:pPr algn="ctr" marL="50800" marR="50800">
                         <a:lnSpc>
                           <a:spcPct val="100000"/>
                         </a:lnSpc>
@@ -4579,7 +4353,7 @@
                         <a:buNone/>
                       </a:pPr>
                       <a:r>
-                        <a:rPr sz="1600" b="0" i="0" u="none" strike="noStrike" cap="none">
+                        <a:rPr cap="none" sz="1600" i="0" b="0" u="none" strike="noStrike">
                           <a:solidFill>
                             <a:srgbClr val="000000">
                               <a:alpha val="100000"/>
@@ -4587,26 +4361,27 @@
                           </a:solidFill>
                           <a:latin typeface="Arial"/>
                           <a:cs typeface="Arial"/>
+                          <a:ea typeface="Arial"/>
                           <a:sym typeface="Arial"/>
                         </a:rPr>
                         <a:t>6</a:t>
                       </a:r>
                     </a:p>
                   </a:txBody>
-                  <a:tcPr marL="0" marR="0" marT="50800" marB="50800" anchor="ctr">
-                    <a:lnL w="0" cap="flat" cmpd="sng" algn="ctr">
+                  <a:tcPr anchor="ctr" marB="50800" marT="50800" marR="0" marL="0">
+                    <a:lnL algn="ctr" cmpd="sng" cap="flat" w="0">
                       <a:noFill/>
                       <a:prstDash val="solid"/>
                     </a:lnL>
-                    <a:lnR w="0" cap="flat" cmpd="sng" algn="ctr">
+                    <a:lnR algn="ctr" cmpd="sng" cap="flat" w="0">
                       <a:noFill/>
                       <a:prstDash val="solid"/>
                     </a:lnR>
-                    <a:lnT w="0" cap="flat" cmpd="sng" algn="ctr">
+                    <a:lnT algn="ctr" cmpd="sng" cap="flat" w="0">
                       <a:noFill/>
                       <a:prstDash val="solid"/>
                     </a:lnT>
-                    <a:lnB w="0" cap="flat" cmpd="sng" algn="ctr">
+                    <a:lnB algn="ctr" cmpd="sng" cap="flat" w="0">
                       <a:noFill/>
                       <a:prstDash val="solid"/>
                     </a:lnB>
@@ -4617,19 +4392,14 @@
                     </a:solidFill>
                   </a:tcPr>
                 </a:tc>
-                <a:extLst>
-                  <a:ext uri="{0D108BD9-81ED-4DB2-BD59-A6C34878D82A}">
-                    <a16:rowId xmlns:a16="http://schemas.microsoft.com/office/drawing/2014/main" val="10005"/>
-                  </a:ext>
-                </a:extLst>
               </a:tr>
-              <a:tr h="485874">
+              <a:tr h="415125">
                 <a:tc>
                   <a:txBody>
                     <a:bodyPr/>
                     <a:lstStyle/>
                     <a:p>
-                      <a:pPr marL="50800" marR="50800" algn="l">
+                      <a:pPr algn="l" marL="50800" marR="50800">
                         <a:lnSpc>
                           <a:spcPct val="100000"/>
                         </a:lnSpc>
@@ -4642,7 +4412,7 @@
                         <a:buNone/>
                       </a:pPr>
                       <a:r>
-                        <a:rPr sz="1600" b="0" i="0" u="none" strike="noStrike" cap="none" dirty="0" err="1">
+                        <a:rPr cap="none" sz="1600" i="0" b="0" u="none" strike="noStrike">
                           <a:solidFill>
                             <a:srgbClr val="000000">
                               <a:alpha val="100000"/>
@@ -4650,36 +4420,27 @@
                           </a:solidFill>
                           <a:latin typeface="Arial"/>
                           <a:cs typeface="Arial"/>
+                          <a:ea typeface="Arial"/>
                           <a:sym typeface="Arial"/>
                         </a:rPr>
                         <a:t>Montsinery</a:t>
                       </a:r>
-                      <a:endParaRPr sz="1600" b="0" i="0" u="none" strike="noStrike" cap="none" dirty="0">
-                        <a:solidFill>
-                          <a:srgbClr val="000000">
-                            <a:alpha val="100000"/>
-                          </a:srgbClr>
-                        </a:solidFill>
-                        <a:latin typeface="Arial"/>
-                        <a:cs typeface="Arial"/>
-                        <a:sym typeface="Arial"/>
-                      </a:endParaRPr>
                     </a:p>
                   </a:txBody>
-                  <a:tcPr marL="0" marR="0" marT="50800" marB="50800" anchor="ctr">
-                    <a:lnL w="0" cap="flat" cmpd="sng" algn="ctr">
+                  <a:tcPr anchor="ctr" marB="50800" marT="50800" marR="0" marL="0">
+                    <a:lnL algn="ctr" cmpd="sng" cap="flat" w="0">
                       <a:noFill/>
                       <a:prstDash val="solid"/>
                     </a:lnL>
-                    <a:lnR w="0" cap="flat" cmpd="sng" algn="ctr">
+                    <a:lnR algn="ctr" cmpd="sng" cap="flat" w="0">
                       <a:noFill/>
                       <a:prstDash val="solid"/>
                     </a:lnR>
-                    <a:lnT w="0" cap="flat" cmpd="sng" algn="ctr">
+                    <a:lnT algn="ctr" cmpd="sng" cap="flat" w="0">
                       <a:noFill/>
                       <a:prstDash val="solid"/>
                     </a:lnT>
-                    <a:lnB w="0" cap="flat" cmpd="sng" algn="ctr">
+                    <a:lnB algn="ctr" cmpd="sng" cap="flat" w="0">
                       <a:noFill/>
                       <a:prstDash val="solid"/>
                     </a:lnB>
@@ -4695,7 +4456,7 @@
                     <a:bodyPr/>
                     <a:lstStyle/>
                     <a:p>
-                      <a:pPr marL="50800" marR="50800" algn="ctr">
+                      <a:pPr algn="ctr" marL="50800" marR="50800">
                         <a:lnSpc>
                           <a:spcPct val="100000"/>
                         </a:lnSpc>
@@ -4708,7 +4469,7 @@
                         <a:buNone/>
                       </a:pPr>
                       <a:r>
-                        <a:rPr sz="1600" b="0" i="0" u="none" strike="noStrike" cap="none">
+                        <a:rPr cap="none" sz="1600" i="0" b="0" u="none" strike="noStrike">
                           <a:solidFill>
                             <a:srgbClr val="000000">
                               <a:alpha val="100000"/>
@@ -4716,26 +4477,27 @@
                           </a:solidFill>
                           <a:latin typeface="Arial"/>
                           <a:cs typeface="Arial"/>
+                          <a:ea typeface="Arial"/>
                           <a:sym typeface="Arial"/>
                         </a:rPr>
                         <a:t>5</a:t>
                       </a:r>
                     </a:p>
                   </a:txBody>
-                  <a:tcPr marL="0" marR="0" marT="50800" marB="50800" anchor="ctr">
-                    <a:lnL w="0" cap="flat" cmpd="sng" algn="ctr">
+                  <a:tcPr anchor="ctr" marB="50800" marT="50800" marR="0" marL="0">
+                    <a:lnL algn="ctr" cmpd="sng" cap="flat" w="0">
                       <a:noFill/>
                       <a:prstDash val="solid"/>
                     </a:lnL>
-                    <a:lnR w="0" cap="flat" cmpd="sng" algn="ctr">
+                    <a:lnR algn="ctr" cmpd="sng" cap="flat" w="0">
                       <a:noFill/>
                       <a:prstDash val="solid"/>
                     </a:lnR>
-                    <a:lnT w="0" cap="flat" cmpd="sng" algn="ctr">
+                    <a:lnT algn="ctr" cmpd="sng" cap="flat" w="0">
                       <a:noFill/>
                       <a:prstDash val="solid"/>
                     </a:lnT>
-                    <a:lnB w="0" cap="flat" cmpd="sng" algn="ctr">
+                    <a:lnB algn="ctr" cmpd="sng" cap="flat" w="0">
                       <a:noFill/>
                       <a:prstDash val="solid"/>
                     </a:lnB>
@@ -4746,19 +4508,14 @@
                     </a:solidFill>
                   </a:tcPr>
                 </a:tc>
-                <a:extLst>
-                  <a:ext uri="{0D108BD9-81ED-4DB2-BD59-A6C34878D82A}">
-                    <a16:rowId xmlns:a16="http://schemas.microsoft.com/office/drawing/2014/main" val="10006"/>
-                  </a:ext>
-                </a:extLst>
               </a:tr>
-              <a:tr h="439538">
+              <a:tr h="375536">
                 <a:tc>
                   <a:txBody>
                     <a:bodyPr/>
                     <a:lstStyle/>
                     <a:p>
-                      <a:pPr marL="50800" marR="50800" algn="l">
+                      <a:pPr algn="l" marL="50800" marR="50800">
                         <a:lnSpc>
                           <a:spcPct val="100000"/>
                         </a:lnSpc>
@@ -4771,7 +4528,7 @@
                         <a:buNone/>
                       </a:pPr>
                       <a:r>
-                        <a:rPr sz="1600" b="0" i="0" u="none" strike="noStrike" cap="none">
+                        <a:rPr cap="none" sz="1600" i="0" b="0" u="none" strike="noStrike">
                           <a:solidFill>
                             <a:srgbClr val="000000">
                               <a:alpha val="100000"/>
@@ -4779,26 +4536,27 @@
                           </a:solidFill>
                           <a:latin typeface="Arial"/>
                           <a:cs typeface="Arial"/>
+                          <a:ea typeface="Arial"/>
                           <a:sym typeface="Arial"/>
                         </a:rPr>
                         <a:t>Roura</a:t>
                       </a:r>
                     </a:p>
                   </a:txBody>
-                  <a:tcPr marL="0" marR="0" marT="50800" marB="50800" anchor="ctr">
-                    <a:lnL w="0" cap="flat" cmpd="sng" algn="ctr">
+                  <a:tcPr anchor="ctr" marB="50800" marT="50800" marR="0" marL="0">
+                    <a:lnL algn="ctr" cmpd="sng" cap="flat" w="0">
                       <a:noFill/>
                       <a:prstDash val="solid"/>
                     </a:lnL>
-                    <a:lnR w="0" cap="flat" cmpd="sng" algn="ctr">
+                    <a:lnR algn="ctr" cmpd="sng" cap="flat" w="0">
                       <a:noFill/>
                       <a:prstDash val="solid"/>
                     </a:lnR>
-                    <a:lnT w="0" cap="flat" cmpd="sng" algn="ctr">
+                    <a:lnT algn="ctr" cmpd="sng" cap="flat" w="0">
                       <a:noFill/>
                       <a:prstDash val="solid"/>
                     </a:lnT>
-                    <a:lnB w="0" cap="flat" cmpd="sng" algn="ctr">
+                    <a:lnB algn="ctr" cmpd="sng" cap="flat" w="0">
                       <a:noFill/>
                       <a:prstDash val="solid"/>
                     </a:lnB>
@@ -4814,7 +4572,7 @@
                     <a:bodyPr/>
                     <a:lstStyle/>
                     <a:p>
-                      <a:pPr marL="50800" marR="50800" algn="ctr">
+                      <a:pPr algn="ctr" marL="50800" marR="50800">
                         <a:lnSpc>
                           <a:spcPct val="100000"/>
                         </a:lnSpc>
@@ -4827,7 +4585,7 @@
                         <a:buNone/>
                       </a:pPr>
                       <a:r>
-                        <a:rPr sz="1600" b="0" i="0" u="none" strike="noStrike" cap="none">
+                        <a:rPr cap="none" sz="1600" i="0" b="0" u="none" strike="noStrike">
                           <a:solidFill>
                             <a:srgbClr val="000000">
                               <a:alpha val="100000"/>
@@ -4835,26 +4593,27 @@
                           </a:solidFill>
                           <a:latin typeface="Arial"/>
                           <a:cs typeface="Arial"/>
+                          <a:ea typeface="Arial"/>
                           <a:sym typeface="Arial"/>
                         </a:rPr>
                         <a:t>3</a:t>
                       </a:r>
                     </a:p>
                   </a:txBody>
-                  <a:tcPr marL="0" marR="0" marT="50800" marB="50800" anchor="ctr">
-                    <a:lnL w="0" cap="flat" cmpd="sng" algn="ctr">
+                  <a:tcPr anchor="ctr" marB="50800" marT="50800" marR="0" marL="0">
+                    <a:lnL algn="ctr" cmpd="sng" cap="flat" w="0">
                       <a:noFill/>
                       <a:prstDash val="solid"/>
                     </a:lnL>
-                    <a:lnR w="0" cap="flat" cmpd="sng" algn="ctr">
+                    <a:lnR algn="ctr" cmpd="sng" cap="flat" w="0">
                       <a:noFill/>
                       <a:prstDash val="solid"/>
                     </a:lnR>
-                    <a:lnT w="0" cap="flat" cmpd="sng" algn="ctr">
+                    <a:lnT algn="ctr" cmpd="sng" cap="flat" w="0">
                       <a:noFill/>
                       <a:prstDash val="solid"/>
                     </a:lnT>
-                    <a:lnB w="0" cap="flat" cmpd="sng" algn="ctr">
+                    <a:lnB algn="ctr" cmpd="sng" cap="flat" w="0">
                       <a:noFill/>
                       <a:prstDash val="solid"/>
                     </a:lnB>
@@ -4865,19 +4624,14 @@
                     </a:solidFill>
                   </a:tcPr>
                 </a:tc>
-                <a:extLst>
-                  <a:ext uri="{0D108BD9-81ED-4DB2-BD59-A6C34878D82A}">
-                    <a16:rowId xmlns:a16="http://schemas.microsoft.com/office/drawing/2014/main" val="10007"/>
-                  </a:ext>
-                </a:extLst>
               </a:tr>
-              <a:tr h="438610">
+              <a:tr h="374743">
                 <a:tc>
                   <a:txBody>
                     <a:bodyPr/>
                     <a:lstStyle/>
                     <a:p>
-                      <a:pPr marL="50800" marR="50800" algn="l">
+                      <a:pPr algn="l" marL="50800" marR="50800">
                         <a:lnSpc>
                           <a:spcPct val="100000"/>
                         </a:lnSpc>
@@ -4890,7 +4644,7 @@
                         <a:buNone/>
                       </a:pPr>
                       <a:r>
-                        <a:rPr sz="1600" b="0" i="0" u="none" strike="noStrike" cap="none">
+                        <a:rPr cap="none" sz="1600" i="0" b="0" u="none" strike="noStrike">
                           <a:solidFill>
                             <a:srgbClr val="000000">
                               <a:alpha val="100000"/>
@@ -4898,26 +4652,27 @@
                           </a:solidFill>
                           <a:latin typeface="Arial"/>
                           <a:cs typeface="Arial"/>
+                          <a:ea typeface="Arial"/>
                           <a:sym typeface="Arial"/>
                         </a:rPr>
                         <a:t>Kourou</a:t>
                       </a:r>
                     </a:p>
                   </a:txBody>
-                  <a:tcPr marL="0" marR="0" marT="50800" marB="50800" anchor="ctr">
-                    <a:lnL w="0" cap="flat" cmpd="sng" algn="ctr">
+                  <a:tcPr anchor="ctr" marB="50800" marT="50800" marR="0" marL="0">
+                    <a:lnL algn="ctr" cmpd="sng" cap="flat" w="0">
                       <a:noFill/>
                       <a:prstDash val="solid"/>
                     </a:lnL>
-                    <a:lnR w="0" cap="flat" cmpd="sng" algn="ctr">
+                    <a:lnR algn="ctr" cmpd="sng" cap="flat" w="0">
                       <a:noFill/>
                       <a:prstDash val="solid"/>
                     </a:lnR>
-                    <a:lnT w="0" cap="flat" cmpd="sng" algn="ctr">
+                    <a:lnT algn="ctr" cmpd="sng" cap="flat" w="0">
                       <a:noFill/>
                       <a:prstDash val="solid"/>
                     </a:lnT>
-                    <a:lnB w="0" cap="flat" cmpd="sng" algn="ctr">
+                    <a:lnB algn="ctr" cmpd="sng" cap="flat" w="0">
                       <a:noFill/>
                       <a:prstDash val="solid"/>
                     </a:lnB>
@@ -4933,7 +4688,7 @@
                     <a:bodyPr/>
                     <a:lstStyle/>
                     <a:p>
-                      <a:pPr marL="50800" marR="50800" algn="ctr">
+                      <a:pPr algn="ctr" marL="50800" marR="50800">
                         <a:lnSpc>
                           <a:spcPct val="100000"/>
                         </a:lnSpc>
@@ -4946,7 +4701,7 @@
                         <a:buNone/>
                       </a:pPr>
                       <a:r>
-                        <a:rPr sz="1600" b="0" i="0" u="none" strike="noStrike" cap="none">
+                        <a:rPr cap="none" sz="1600" i="0" b="0" u="none" strike="noStrike">
                           <a:solidFill>
                             <a:srgbClr val="000000">
                               <a:alpha val="100000"/>
@@ -4954,26 +4709,27 @@
                           </a:solidFill>
                           <a:latin typeface="Arial"/>
                           <a:cs typeface="Arial"/>
+                          <a:ea typeface="Arial"/>
                           <a:sym typeface="Arial"/>
                         </a:rPr>
                         <a:t>2</a:t>
                       </a:r>
                     </a:p>
                   </a:txBody>
-                  <a:tcPr marL="0" marR="0" marT="50800" marB="50800" anchor="ctr">
-                    <a:lnL w="0" cap="flat" cmpd="sng" algn="ctr">
+                  <a:tcPr anchor="ctr" marB="50800" marT="50800" marR="0" marL="0">
+                    <a:lnL algn="ctr" cmpd="sng" cap="flat" w="0">
                       <a:noFill/>
                       <a:prstDash val="solid"/>
                     </a:lnL>
-                    <a:lnR w="0" cap="flat" cmpd="sng" algn="ctr">
+                    <a:lnR algn="ctr" cmpd="sng" cap="flat" w="0">
                       <a:noFill/>
                       <a:prstDash val="solid"/>
                     </a:lnR>
-                    <a:lnT w="0" cap="flat" cmpd="sng" algn="ctr">
+                    <a:lnT algn="ctr" cmpd="sng" cap="flat" w="0">
                       <a:noFill/>
                       <a:prstDash val="solid"/>
                     </a:lnT>
-                    <a:lnB w="0" cap="flat" cmpd="sng" algn="ctr">
+                    <a:lnB algn="ctr" cmpd="sng" cap="flat" w="0">
                       <a:noFill/>
                       <a:prstDash val="solid"/>
                     </a:lnB>
@@ -4984,19 +4740,14 @@
                     </a:solidFill>
                   </a:tcPr>
                 </a:tc>
-                <a:extLst>
-                  <a:ext uri="{0D108BD9-81ED-4DB2-BD59-A6C34878D82A}">
-                    <a16:rowId xmlns:a16="http://schemas.microsoft.com/office/drawing/2014/main" val="10008"/>
-                  </a:ext>
-                </a:extLst>
               </a:tr>
-              <a:tr h="488777">
+              <a:tr h="417605">
                 <a:tc>
                   <a:txBody>
                     <a:bodyPr/>
                     <a:lstStyle/>
                     <a:p>
-                      <a:pPr marL="50800" marR="50800" algn="l">
+                      <a:pPr algn="l" marL="50800" marR="50800">
                         <a:lnSpc>
                           <a:spcPct val="100000"/>
                         </a:lnSpc>
@@ -5009,7 +4760,7 @@
                         <a:buNone/>
                       </a:pPr>
                       <a:r>
-                        <a:rPr sz="1600" b="0" i="0" u="none" strike="noStrike" cap="none">
+                        <a:rPr cap="none" sz="1600" i="0" b="0" u="none" strike="noStrike">
                           <a:solidFill>
                             <a:srgbClr val="000000">
                               <a:alpha val="100000"/>
@@ -5017,26 +4768,27 @@
                           </a:solidFill>
                           <a:latin typeface="Arial"/>
                           <a:cs typeface="Arial"/>
+                          <a:ea typeface="Arial"/>
                           <a:sym typeface="Arial"/>
                         </a:rPr>
                         <a:t>Sinnamary</a:t>
                       </a:r>
                     </a:p>
                   </a:txBody>
-                  <a:tcPr marL="0" marR="0" marT="50800" marB="50800" anchor="ctr">
-                    <a:lnL w="0" cap="flat" cmpd="sng" algn="ctr">
+                  <a:tcPr anchor="ctr" marB="50800" marT="50800" marR="0" marL="0">
+                    <a:lnL algn="ctr" cmpd="sng" cap="flat" w="0">
                       <a:noFill/>
                       <a:prstDash val="solid"/>
                     </a:lnL>
-                    <a:lnR w="0" cap="flat" cmpd="sng" algn="ctr">
+                    <a:lnR algn="ctr" cmpd="sng" cap="flat" w="0">
                       <a:noFill/>
                       <a:prstDash val="solid"/>
                     </a:lnR>
-                    <a:lnT w="0" cap="flat" cmpd="sng" algn="ctr">
+                    <a:lnT algn="ctr" cmpd="sng" cap="flat" w="0">
                       <a:noFill/>
                       <a:prstDash val="solid"/>
                     </a:lnT>
-                    <a:lnB w="0" cap="flat" cmpd="sng" algn="ctr">
+                    <a:lnB algn="ctr" cmpd="sng" cap="flat" w="0">
                       <a:noFill/>
                       <a:prstDash val="solid"/>
                     </a:lnB>
@@ -5052,7 +4804,7 @@
                     <a:bodyPr/>
                     <a:lstStyle/>
                     <a:p>
-                      <a:pPr marL="50800" marR="50800" algn="ctr">
+                      <a:pPr algn="ctr" marL="50800" marR="50800">
                         <a:lnSpc>
                           <a:spcPct val="100000"/>
                         </a:lnSpc>
@@ -5065,7 +4817,7 @@
                         <a:buNone/>
                       </a:pPr>
                       <a:r>
-                        <a:rPr sz="1600" b="0" i="0" u="none" strike="noStrike" cap="none">
+                        <a:rPr cap="none" sz="1600" i="0" b="0" u="none" strike="noStrike">
                           <a:solidFill>
                             <a:srgbClr val="000000">
                               <a:alpha val="100000"/>
@@ -5073,26 +4825,27 @@
                           </a:solidFill>
                           <a:latin typeface="Arial"/>
                           <a:cs typeface="Arial"/>
+                          <a:ea typeface="Arial"/>
                           <a:sym typeface="Arial"/>
                         </a:rPr>
                         <a:t>2</a:t>
                       </a:r>
                     </a:p>
                   </a:txBody>
-                  <a:tcPr marL="0" marR="0" marT="50800" marB="50800" anchor="ctr">
-                    <a:lnL w="0" cap="flat" cmpd="sng" algn="ctr">
+                  <a:tcPr anchor="ctr" marB="50800" marT="50800" marR="0" marL="0">
+                    <a:lnL algn="ctr" cmpd="sng" cap="flat" w="0">
                       <a:noFill/>
                       <a:prstDash val="solid"/>
                     </a:lnL>
-                    <a:lnR w="0" cap="flat" cmpd="sng" algn="ctr">
+                    <a:lnR algn="ctr" cmpd="sng" cap="flat" w="0">
                       <a:noFill/>
                       <a:prstDash val="solid"/>
                     </a:lnR>
-                    <a:lnT w="0" cap="flat" cmpd="sng" algn="ctr">
+                    <a:lnT algn="ctr" cmpd="sng" cap="flat" w="0">
                       <a:noFill/>
                       <a:prstDash val="solid"/>
                     </a:lnT>
-                    <a:lnB w="0" cap="flat" cmpd="sng" algn="ctr">
+                    <a:lnB algn="ctr" cmpd="sng" cap="flat" w="0">
                       <a:noFill/>
                       <a:prstDash val="solid"/>
                     </a:lnB>
@@ -5103,19 +4856,14 @@
                     </a:solidFill>
                   </a:tcPr>
                 </a:tc>
-                <a:extLst>
-                  <a:ext uri="{0D108BD9-81ED-4DB2-BD59-A6C34878D82A}">
-                    <a16:rowId xmlns:a16="http://schemas.microsoft.com/office/drawing/2014/main" val="10009"/>
-                  </a:ext>
-                </a:extLst>
               </a:tr>
-              <a:tr h="485874">
+              <a:tr h="415125">
                 <a:tc>
                   <a:txBody>
                     <a:bodyPr/>
                     <a:lstStyle/>
                     <a:p>
-                      <a:pPr marL="50800" marR="50800" algn="l">
+                      <a:pPr algn="l" marL="50800" marR="50800">
                         <a:lnSpc>
                           <a:spcPct val="100000"/>
                         </a:lnSpc>
@@ -5128,7 +4876,7 @@
                         <a:buNone/>
                       </a:pPr>
                       <a:r>
-                        <a:rPr sz="1600" b="0" i="0" u="none" strike="noStrike" cap="none">
+                        <a:rPr cap="none" sz="1600" i="0" b="0" u="none" strike="noStrike">
                           <a:solidFill>
                             <a:srgbClr val="000000">
                               <a:alpha val="100000"/>
@@ -5136,26 +4884,27 @@
                           </a:solidFill>
                           <a:latin typeface="Arial"/>
                           <a:cs typeface="Arial"/>
+                          <a:ea typeface="Arial"/>
                           <a:sym typeface="Arial"/>
                         </a:rPr>
                         <a:t>Regina</a:t>
                       </a:r>
                     </a:p>
                   </a:txBody>
-                  <a:tcPr marL="0" marR="0" marT="50800" marB="50800" anchor="ctr">
-                    <a:lnL w="0" cap="flat" cmpd="sng" algn="ctr">
+                  <a:tcPr anchor="ctr" marB="50800" marT="50800" marR="0" marL="0">
+                    <a:lnL algn="ctr" cmpd="sng" cap="flat" w="0">
                       <a:noFill/>
                       <a:prstDash val="solid"/>
                     </a:lnL>
-                    <a:lnR w="0" cap="flat" cmpd="sng" algn="ctr">
+                    <a:lnR algn="ctr" cmpd="sng" cap="flat" w="0">
                       <a:noFill/>
                       <a:prstDash val="solid"/>
                     </a:lnR>
-                    <a:lnT w="0" cap="flat" cmpd="sng" algn="ctr">
+                    <a:lnT algn="ctr" cmpd="sng" cap="flat" w="0">
                       <a:noFill/>
                       <a:prstDash val="solid"/>
                     </a:lnT>
-                    <a:lnB w="19050" cap="flat" cmpd="sng" algn="ctr">
+                    <a:lnB algn="ctr" cmpd="sng" cap="flat" w="19050">
                       <a:solidFill>
                         <a:srgbClr val="666666">
                           <a:alpha val="100000"/>
@@ -5175,7 +4924,7 @@
                     <a:bodyPr/>
                     <a:lstStyle/>
                     <a:p>
-                      <a:pPr marL="50800" marR="50800" algn="ctr">
+                      <a:pPr algn="ctr" marL="50800" marR="50800">
                         <a:lnSpc>
                           <a:spcPct val="100000"/>
                         </a:lnSpc>
@@ -5188,7 +4937,7 @@
                         <a:buNone/>
                       </a:pPr>
                       <a:r>
-                        <a:rPr sz="1600" b="0" i="0" u="none" strike="noStrike" cap="none" dirty="0">
+                        <a:rPr cap="none" sz="1600" i="0" b="0" u="none" strike="noStrike">
                           <a:solidFill>
                             <a:srgbClr val="000000">
                               <a:alpha val="100000"/>
@@ -5196,26 +4945,27 @@
                           </a:solidFill>
                           <a:latin typeface="Arial"/>
                           <a:cs typeface="Arial"/>
+                          <a:ea typeface="Arial"/>
                           <a:sym typeface="Arial"/>
                         </a:rPr>
                         <a:t>1</a:t>
                       </a:r>
                     </a:p>
                   </a:txBody>
-                  <a:tcPr marL="0" marR="0" marT="50800" marB="50800" anchor="ctr">
-                    <a:lnL w="0" cap="flat" cmpd="sng" algn="ctr">
+                  <a:tcPr anchor="ctr" marB="50800" marT="50800" marR="0" marL="0">
+                    <a:lnL algn="ctr" cmpd="sng" cap="flat" w="0">
                       <a:noFill/>
                       <a:prstDash val="solid"/>
                     </a:lnL>
-                    <a:lnR w="0" cap="flat" cmpd="sng" algn="ctr">
+                    <a:lnR algn="ctr" cmpd="sng" cap="flat" w="0">
                       <a:noFill/>
                       <a:prstDash val="solid"/>
                     </a:lnR>
-                    <a:lnT w="0" cap="flat" cmpd="sng" algn="ctr">
+                    <a:lnT algn="ctr" cmpd="sng" cap="flat" w="0">
                       <a:noFill/>
                       <a:prstDash val="solid"/>
                     </a:lnT>
-                    <a:lnB w="19050" cap="flat" cmpd="sng" algn="ctr">
+                    <a:lnB algn="ctr" cmpd="sng" cap="flat" w="19050">
                       <a:solidFill>
                         <a:srgbClr val="666666">
                           <a:alpha val="100000"/>
@@ -5230,11 +4980,6 @@
                     </a:solidFill>
                   </a:tcPr>
                 </a:tc>
-                <a:extLst>
-                  <a:ext uri="{0D108BD9-81ED-4DB2-BD59-A6C34878D82A}">
-                    <a16:rowId xmlns:a16="http://schemas.microsoft.com/office/drawing/2014/main" val="10010"/>
-                  </a:ext>
-                </a:extLst>
               </a:tr>
             </a:tbl>
           </a:graphicData>

--- a/data/presentation/tableaux_pres.pptx
+++ b/data/presentation/tableaux_pres.pptx
@@ -3504,7 +3504,7 @@
                           <a:ea typeface="Arial"/>
                           <a:sym typeface="Arial"/>
                         </a:rPr>
-                        <a:t>25</a:t>
+                        <a:t>29</a:t>
                       </a:r>
                     </a:p>
                   </a:txBody>
@@ -4045,6 +4045,122 @@
                   </a:tcPr>
                 </a:tc>
               </a:tr>
+              <a:tr h="377422">
+                <a:tc>
+                  <a:txBody>
+                    <a:bodyPr/>
+                    <a:lstStyle/>
+                    <a:p>
+                      <a:pPr algn="l" marL="50800" marR="50800">
+                        <a:lnSpc>
+                          <a:spcPct val="100000"/>
+                        </a:lnSpc>
+                        <a:spcBef>
+                          <a:spcPts val="400"/>
+                        </a:spcBef>
+                        <a:spcAft>
+                          <a:spcPts val="400"/>
+                        </a:spcAft>
+                        <a:buNone/>
+                      </a:pPr>
+                      <a:r>
+                        <a:rPr cap="none" sz="1600" i="0" b="0" u="none" strike="noStrike">
+                          <a:solidFill>
+                            <a:srgbClr val="000000">
+                              <a:alpha val="100000"/>
+                            </a:srgbClr>
+                          </a:solidFill>
+                          <a:latin typeface="Arial"/>
+                          <a:cs typeface="Arial"/>
+                          <a:ea typeface="Arial"/>
+                          <a:sym typeface="Arial"/>
+                        </a:rPr>
+                        <a:t>SGO</a:t>
+                      </a:r>
+                    </a:p>
+                  </a:txBody>
+                  <a:tcPr anchor="ctr" marB="50800" marT="50800" marR="0" marL="0">
+                    <a:lnL algn="ctr" cmpd="sng" cap="flat" w="0">
+                      <a:noFill/>
+                      <a:prstDash val="solid"/>
+                    </a:lnL>
+                    <a:lnR algn="ctr" cmpd="sng" cap="flat" w="0">
+                      <a:noFill/>
+                      <a:prstDash val="solid"/>
+                    </a:lnR>
+                    <a:lnT algn="ctr" cmpd="sng" cap="flat" w="0">
+                      <a:noFill/>
+                      <a:prstDash val="solid"/>
+                    </a:lnT>
+                    <a:lnB algn="ctr" cmpd="sng" cap="flat" w="0">
+                      <a:noFill/>
+                      <a:prstDash val="solid"/>
+                    </a:lnB>
+                    <a:solidFill>
+                      <a:srgbClr val="FFFFFF">
+                        <a:alpha val="0"/>
+                      </a:srgbClr>
+                    </a:solidFill>
+                  </a:tcPr>
+                </a:tc>
+                <a:tc>
+                  <a:txBody>
+                    <a:bodyPr/>
+                    <a:lstStyle/>
+                    <a:p>
+                      <a:pPr algn="ctr" marL="50800" marR="50800">
+                        <a:lnSpc>
+                          <a:spcPct val="100000"/>
+                        </a:lnSpc>
+                        <a:spcBef>
+                          <a:spcPts val="400"/>
+                        </a:spcBef>
+                        <a:spcAft>
+                          <a:spcPts val="400"/>
+                        </a:spcAft>
+                        <a:buNone/>
+                      </a:pPr>
+                      <a:r>
+                        <a:rPr cap="none" sz="1600" i="0" b="0" u="none" strike="noStrike">
+                          <a:solidFill>
+                            <a:srgbClr val="000000">
+                              <a:alpha val="100000"/>
+                            </a:srgbClr>
+                          </a:solidFill>
+                          <a:latin typeface="Arial"/>
+                          <a:cs typeface="Arial"/>
+                          <a:ea typeface="Arial"/>
+                          <a:sym typeface="Arial"/>
+                        </a:rPr>
+                        <a:t>12</a:t>
+                      </a:r>
+                    </a:p>
+                  </a:txBody>
+                  <a:tcPr anchor="ctr" marB="50800" marT="50800" marR="0" marL="0">
+                    <a:lnL algn="ctr" cmpd="sng" cap="flat" w="0">
+                      <a:noFill/>
+                      <a:prstDash val="solid"/>
+                    </a:lnL>
+                    <a:lnR algn="ctr" cmpd="sng" cap="flat" w="0">
+                      <a:noFill/>
+                      <a:prstDash val="solid"/>
+                    </a:lnR>
+                    <a:lnT algn="ctr" cmpd="sng" cap="flat" w="0">
+                      <a:noFill/>
+                      <a:prstDash val="solid"/>
+                    </a:lnT>
+                    <a:lnB algn="ctr" cmpd="sng" cap="flat" w="0">
+                      <a:noFill/>
+                      <a:prstDash val="solid"/>
+                    </a:lnB>
+                    <a:solidFill>
+                      <a:srgbClr val="FFFFFF">
+                        <a:alpha val="0"/>
+                      </a:srgbClr>
+                    </a:solidFill>
+                  </a:tcPr>
+                </a:tc>
+              </a:tr>
               <a:tr h="374743">
                 <a:tc>
                   <a:txBody>
@@ -4133,122 +4249,6 @@
                           <a:sym typeface="Arial"/>
                         </a:rPr>
                         <a:t>11</a:t>
-                      </a:r>
-                    </a:p>
-                  </a:txBody>
-                  <a:tcPr anchor="ctr" marB="50800" marT="50800" marR="0" marL="0">
-                    <a:lnL algn="ctr" cmpd="sng" cap="flat" w="0">
-                      <a:noFill/>
-                      <a:prstDash val="solid"/>
-                    </a:lnL>
-                    <a:lnR algn="ctr" cmpd="sng" cap="flat" w="0">
-                      <a:noFill/>
-                      <a:prstDash val="solid"/>
-                    </a:lnR>
-                    <a:lnT algn="ctr" cmpd="sng" cap="flat" w="0">
-                      <a:noFill/>
-                      <a:prstDash val="solid"/>
-                    </a:lnT>
-                    <a:lnB algn="ctr" cmpd="sng" cap="flat" w="0">
-                      <a:noFill/>
-                      <a:prstDash val="solid"/>
-                    </a:lnB>
-                    <a:solidFill>
-                      <a:srgbClr val="FFFFFF">
-                        <a:alpha val="0"/>
-                      </a:srgbClr>
-                    </a:solidFill>
-                  </a:tcPr>
-                </a:tc>
-              </a:tr>
-              <a:tr h="377422">
-                <a:tc>
-                  <a:txBody>
-                    <a:bodyPr/>
-                    <a:lstStyle/>
-                    <a:p>
-                      <a:pPr algn="l" marL="50800" marR="50800">
-                        <a:lnSpc>
-                          <a:spcPct val="100000"/>
-                        </a:lnSpc>
-                        <a:spcBef>
-                          <a:spcPts val="400"/>
-                        </a:spcBef>
-                        <a:spcAft>
-                          <a:spcPts val="400"/>
-                        </a:spcAft>
-                        <a:buNone/>
-                      </a:pPr>
-                      <a:r>
-                        <a:rPr cap="none" sz="1600" i="0" b="0" u="none" strike="noStrike">
-                          <a:solidFill>
-                            <a:srgbClr val="000000">
-                              <a:alpha val="100000"/>
-                            </a:srgbClr>
-                          </a:solidFill>
-                          <a:latin typeface="Arial"/>
-                          <a:cs typeface="Arial"/>
-                          <a:ea typeface="Arial"/>
-                          <a:sym typeface="Arial"/>
-                        </a:rPr>
-                        <a:t>SGO</a:t>
-                      </a:r>
-                    </a:p>
-                  </a:txBody>
-                  <a:tcPr anchor="ctr" marB="50800" marT="50800" marR="0" marL="0">
-                    <a:lnL algn="ctr" cmpd="sng" cap="flat" w="0">
-                      <a:noFill/>
-                      <a:prstDash val="solid"/>
-                    </a:lnL>
-                    <a:lnR algn="ctr" cmpd="sng" cap="flat" w="0">
-                      <a:noFill/>
-                      <a:prstDash val="solid"/>
-                    </a:lnR>
-                    <a:lnT algn="ctr" cmpd="sng" cap="flat" w="0">
-                      <a:noFill/>
-                      <a:prstDash val="solid"/>
-                    </a:lnT>
-                    <a:lnB algn="ctr" cmpd="sng" cap="flat" w="0">
-                      <a:noFill/>
-                      <a:prstDash val="solid"/>
-                    </a:lnB>
-                    <a:solidFill>
-                      <a:srgbClr val="FFFFFF">
-                        <a:alpha val="0"/>
-                      </a:srgbClr>
-                    </a:solidFill>
-                  </a:tcPr>
-                </a:tc>
-                <a:tc>
-                  <a:txBody>
-                    <a:bodyPr/>
-                    <a:lstStyle/>
-                    <a:p>
-                      <a:pPr algn="ctr" marL="50800" marR="50800">
-                        <a:lnSpc>
-                          <a:spcPct val="100000"/>
-                        </a:lnSpc>
-                        <a:spcBef>
-                          <a:spcPts val="400"/>
-                        </a:spcBef>
-                        <a:spcAft>
-                          <a:spcPts val="400"/>
-                        </a:spcAft>
-                        <a:buNone/>
-                      </a:pPr>
-                      <a:r>
-                        <a:rPr cap="none" sz="1600" i="0" b="0" u="none" strike="noStrike">
-                          <a:solidFill>
-                            <a:srgbClr val="000000">
-                              <a:alpha val="100000"/>
-                            </a:srgbClr>
-                          </a:solidFill>
-                          <a:latin typeface="Arial"/>
-                          <a:cs typeface="Arial"/>
-                          <a:ea typeface="Arial"/>
-                          <a:sym typeface="Arial"/>
-                        </a:rPr>
-                        <a:t>8</a:t>
                       </a:r>
                     </a:p>
                   </a:txBody>

--- a/data/presentation/tableaux_pres.pptx
+++ b/data/presentation/tableaux_pres.pptx
@@ -2393,7 +2393,7 @@
                   </a:tcPr>
                 </a:tc>
               </a:tr>
-              <a:tr h="375536">
+              <a:tr h="374743">
                 <a:tc>
                   <a:txBody>
                     <a:bodyPr/>
@@ -2480,7 +2480,7 @@
                           <a:ea typeface="Arial"/>
                           <a:sym typeface="Arial"/>
                         </a:rPr>
-                        <a:t>63</a:t>
+                        <a:t>74</a:t>
                       </a:r>
                     </a:p>
                   </a:txBody>
@@ -3388,7 +3388,7 @@
                           <a:ea typeface="Arial"/>
                           <a:sym typeface="Arial"/>
                         </a:rPr>
-                        <a:t>35</a:t>
+                        <a:t>46</a:t>
                       </a:r>
                     </a:p>
                   </a:txBody>
@@ -3929,6 +3929,122 @@
                   </a:tcPr>
                 </a:tc>
               </a:tr>
+              <a:tr h="374743">
+                <a:tc>
+                  <a:txBody>
+                    <a:bodyPr/>
+                    <a:lstStyle/>
+                    <a:p>
+                      <a:pPr algn="l" marL="50800" marR="50800">
+                        <a:lnSpc>
+                          <a:spcPct val="100000"/>
+                        </a:lnSpc>
+                        <a:spcBef>
+                          <a:spcPts val="400"/>
+                        </a:spcBef>
+                        <a:spcAft>
+                          <a:spcPts val="400"/>
+                        </a:spcAft>
+                        <a:buNone/>
+                      </a:pPr>
+                      <a:r>
+                        <a:rPr cap="none" sz="1600" i="0" b="0" u="none" strike="noStrike">
+                          <a:solidFill>
+                            <a:srgbClr val="000000">
+                              <a:alpha val="100000"/>
+                            </a:srgbClr>
+                          </a:solidFill>
+                          <a:latin typeface="Arial"/>
+                          <a:cs typeface="Arial"/>
+                          <a:ea typeface="Arial"/>
+                          <a:sym typeface="Arial"/>
+                        </a:rPr>
+                        <a:t>Mana</a:t>
+                      </a:r>
+                    </a:p>
+                  </a:txBody>
+                  <a:tcPr anchor="ctr" marB="50800" marT="50800" marR="0" marL="0">
+                    <a:lnL algn="ctr" cmpd="sng" cap="flat" w="0">
+                      <a:noFill/>
+                      <a:prstDash val="solid"/>
+                    </a:lnL>
+                    <a:lnR algn="ctr" cmpd="sng" cap="flat" w="0">
+                      <a:noFill/>
+                      <a:prstDash val="solid"/>
+                    </a:lnR>
+                    <a:lnT algn="ctr" cmpd="sng" cap="flat" w="0">
+                      <a:noFill/>
+                      <a:prstDash val="solid"/>
+                    </a:lnT>
+                    <a:lnB algn="ctr" cmpd="sng" cap="flat" w="0">
+                      <a:noFill/>
+                      <a:prstDash val="solid"/>
+                    </a:lnB>
+                    <a:solidFill>
+                      <a:srgbClr val="FFFFFF">
+                        <a:alpha val="0"/>
+                      </a:srgbClr>
+                    </a:solidFill>
+                  </a:tcPr>
+                </a:tc>
+                <a:tc>
+                  <a:txBody>
+                    <a:bodyPr/>
+                    <a:lstStyle/>
+                    <a:p>
+                      <a:pPr algn="ctr" marL="50800" marR="50800">
+                        <a:lnSpc>
+                          <a:spcPct val="100000"/>
+                        </a:lnSpc>
+                        <a:spcBef>
+                          <a:spcPts val="400"/>
+                        </a:spcBef>
+                        <a:spcAft>
+                          <a:spcPts val="400"/>
+                        </a:spcAft>
+                        <a:buNone/>
+                      </a:pPr>
+                      <a:r>
+                        <a:rPr cap="none" sz="1600" i="0" b="0" u="none" strike="noStrike">
+                          <a:solidFill>
+                            <a:srgbClr val="000000">
+                              <a:alpha val="100000"/>
+                            </a:srgbClr>
+                          </a:solidFill>
+                          <a:latin typeface="Arial"/>
+                          <a:cs typeface="Arial"/>
+                          <a:ea typeface="Arial"/>
+                          <a:sym typeface="Arial"/>
+                        </a:rPr>
+                        <a:t>22</a:t>
+                      </a:r>
+                    </a:p>
+                  </a:txBody>
+                  <a:tcPr anchor="ctr" marB="50800" marT="50800" marR="0" marL="0">
+                    <a:lnL algn="ctr" cmpd="sng" cap="flat" w="0">
+                      <a:noFill/>
+                      <a:prstDash val="solid"/>
+                    </a:lnL>
+                    <a:lnR algn="ctr" cmpd="sng" cap="flat" w="0">
+                      <a:noFill/>
+                      <a:prstDash val="solid"/>
+                    </a:lnR>
+                    <a:lnT algn="ctr" cmpd="sng" cap="flat" w="0">
+                      <a:noFill/>
+                      <a:prstDash val="solid"/>
+                    </a:lnT>
+                    <a:lnB algn="ctr" cmpd="sng" cap="flat" w="0">
+                      <a:noFill/>
+                      <a:prstDash val="solid"/>
+                    </a:lnB>
+                    <a:solidFill>
+                      <a:srgbClr val="FFFFFF">
+                        <a:alpha val="0"/>
+                      </a:srgbClr>
+                    </a:solidFill>
+                  </a:tcPr>
+                </a:tc>
+              </a:tr>
               <a:tr h="375536">
                 <a:tc>
                   <a:txBody>
@@ -4133,122 +4249,6 @@
                           <a:sym typeface="Arial"/>
                         </a:rPr>
                         <a:t>12</a:t>
-                      </a:r>
-                    </a:p>
-                  </a:txBody>
-                  <a:tcPr anchor="ctr" marB="50800" marT="50800" marR="0" marL="0">
-                    <a:lnL algn="ctr" cmpd="sng" cap="flat" w="0">
-                      <a:noFill/>
-                      <a:prstDash val="solid"/>
-                    </a:lnL>
-                    <a:lnR algn="ctr" cmpd="sng" cap="flat" w="0">
-                      <a:noFill/>
-                      <a:prstDash val="solid"/>
-                    </a:lnR>
-                    <a:lnT algn="ctr" cmpd="sng" cap="flat" w="0">
-                      <a:noFill/>
-                      <a:prstDash val="solid"/>
-                    </a:lnT>
-                    <a:lnB algn="ctr" cmpd="sng" cap="flat" w="0">
-                      <a:noFill/>
-                      <a:prstDash val="solid"/>
-                    </a:lnB>
-                    <a:solidFill>
-                      <a:srgbClr val="FFFFFF">
-                        <a:alpha val="0"/>
-                      </a:srgbClr>
-                    </a:solidFill>
-                  </a:tcPr>
-                </a:tc>
-              </a:tr>
-              <a:tr h="374743">
-                <a:tc>
-                  <a:txBody>
-                    <a:bodyPr/>
-                    <a:lstStyle/>
-                    <a:p>
-                      <a:pPr algn="l" marL="50800" marR="50800">
-                        <a:lnSpc>
-                          <a:spcPct val="100000"/>
-                        </a:lnSpc>
-                        <a:spcBef>
-                          <a:spcPts val="400"/>
-                        </a:spcBef>
-                        <a:spcAft>
-                          <a:spcPts val="400"/>
-                        </a:spcAft>
-                        <a:buNone/>
-                      </a:pPr>
-                      <a:r>
-                        <a:rPr cap="none" sz="1600" i="0" b="0" u="none" strike="noStrike">
-                          <a:solidFill>
-                            <a:srgbClr val="000000">
-                              <a:alpha val="100000"/>
-                            </a:srgbClr>
-                          </a:solidFill>
-                          <a:latin typeface="Arial"/>
-                          <a:cs typeface="Arial"/>
-                          <a:ea typeface="Arial"/>
-                          <a:sym typeface="Arial"/>
-                        </a:rPr>
-                        <a:t>Mana</a:t>
-                      </a:r>
-                    </a:p>
-                  </a:txBody>
-                  <a:tcPr anchor="ctr" marB="50800" marT="50800" marR="0" marL="0">
-                    <a:lnL algn="ctr" cmpd="sng" cap="flat" w="0">
-                      <a:noFill/>
-                      <a:prstDash val="solid"/>
-                    </a:lnL>
-                    <a:lnR algn="ctr" cmpd="sng" cap="flat" w="0">
-                      <a:noFill/>
-                      <a:prstDash val="solid"/>
-                    </a:lnR>
-                    <a:lnT algn="ctr" cmpd="sng" cap="flat" w="0">
-                      <a:noFill/>
-                      <a:prstDash val="solid"/>
-                    </a:lnT>
-                    <a:lnB algn="ctr" cmpd="sng" cap="flat" w="0">
-                      <a:noFill/>
-                      <a:prstDash val="solid"/>
-                    </a:lnB>
-                    <a:solidFill>
-                      <a:srgbClr val="FFFFFF">
-                        <a:alpha val="0"/>
-                      </a:srgbClr>
-                    </a:solidFill>
-                  </a:tcPr>
-                </a:tc>
-                <a:tc>
-                  <a:txBody>
-                    <a:bodyPr/>
-                    <a:lstStyle/>
-                    <a:p>
-                      <a:pPr algn="ctr" marL="50800" marR="50800">
-                        <a:lnSpc>
-                          <a:spcPct val="100000"/>
-                        </a:lnSpc>
-                        <a:spcBef>
-                          <a:spcPts val="400"/>
-                        </a:spcBef>
-                        <a:spcAft>
-                          <a:spcPts val="400"/>
-                        </a:spcAft>
-                        <a:buNone/>
-                      </a:pPr>
-                      <a:r>
-                        <a:rPr cap="none" sz="1600" i="0" b="0" u="none" strike="noStrike">
-                          <a:solidFill>
-                            <a:srgbClr val="000000">
-                              <a:alpha val="100000"/>
-                            </a:srgbClr>
-                          </a:solidFill>
-                          <a:latin typeface="Arial"/>
-                          <a:cs typeface="Arial"/>
-                          <a:ea typeface="Arial"/>
-                          <a:sym typeface="Arial"/>
-                        </a:rPr>
-                        <a:t>11</a:t>
                       </a:r>
                     </a:p>
                   </a:txBody>
